--- a/PPTs/REVIEW - 2.pptx
+++ b/PPTs/REVIEW - 2.pptx
@@ -50,57 +50,279 @@
 </p:presentation>
 </file>
 
+<file path=ppt/revisionInfo.xml><?xml version="1.0" encoding="utf-8"?>
+<p1510:revInfo xmlns:a="http://schemas.openxmlformats.org/drawingml/2006/main" xmlns:r="http://schemas.openxmlformats.org/officeDocument/2006/relationships" xmlns:p1510="http://schemas.microsoft.com/office/powerpoint/2015/10/main">
+  <p1510:revLst>
+    <p1510:client id="{CEEAF994-60F2-4477-B613-2FD40557E5F4}" v="10" dt="2026-10-26T10:53:32.057"/>
+  </p1510:revLst>
+</p1510:revInfo>
+</file>
+
 <file path=ppt/changesInfos/changesInfo1.xml><?xml version="1.0" encoding="utf-8"?>
 <pc:chgInfo xmlns:a="http://schemas.openxmlformats.org/drawingml/2006/main" xmlns:r="http://schemas.openxmlformats.org/officeDocument/2006/relationships" xmlns:ac="http://schemas.microsoft.com/office/drawing/2013/main/command" xmlns:pc="http://schemas.microsoft.com/office/powerpoint/2013/main/command">
   <pc:docChgLst>
     <pc:chgData name="Manoj Reddy Tetala" userId="d0a499fca1df3751" providerId="LiveId" clId="{844F9A02-E604-4125-9813-311D2C5B92A5}"/>
-    <pc:docChg chg="modSld">
-      <pc:chgData name="Manoj Reddy Tetala" userId="d0a499fca1df3751" providerId="LiveId" clId="{844F9A02-E604-4125-9813-311D2C5B92A5}" dt="2026-10-02T03:37:47.623" v="7" actId="20577"/>
+    <pc:docChg chg="undo custSel modSld">
+      <pc:chgData name="Manoj Reddy Tetala" userId="d0a499fca1df3751" providerId="LiveId" clId="{844F9A02-E604-4125-9813-311D2C5B92A5}" dt="2026-10-26T10:54:21.252" v="117" actId="1076"/>
       <pc:docMkLst>
         <pc:docMk/>
       </pc:docMkLst>
       <pc:sldChg chg="modSp mod">
-        <pc:chgData name="Manoj Reddy Tetala" userId="d0a499fca1df3751" providerId="LiveId" clId="{844F9A02-E604-4125-9813-311D2C5B92A5}" dt="2026-10-02T03:37:47.623" v="7" actId="20577"/>
+        <pc:chgData name="Manoj Reddy Tetala" userId="d0a499fca1df3751" providerId="LiveId" clId="{844F9A02-E604-4125-9813-311D2C5B92A5}" dt="2026-10-26T10:54:21.252" v="117" actId="1076"/>
         <pc:sldMkLst>
           <pc:docMk/>
           <pc:sldMk cId="0" sldId="256"/>
         </pc:sldMkLst>
         <pc:spChg chg="mod">
-          <ac:chgData name="Manoj Reddy Tetala" userId="d0a499fca1df3751" providerId="LiveId" clId="{844F9A02-E604-4125-9813-311D2C5B92A5}" dt="2026-10-02T03:37:47.623" v="7" actId="20577"/>
+          <ac:chgData name="Manoj Reddy Tetala" userId="d0a499fca1df3751" providerId="LiveId" clId="{844F9A02-E604-4125-9813-311D2C5B92A5}" dt="2026-10-26T10:54:21.252" v="117" actId="1076"/>
           <ac:spMkLst>
             <pc:docMk/>
             <pc:sldMk cId="0" sldId="256"/>
-            <ac:spMk id="7" creationId="{00000000-0000-0000-0000-000000000000}"/>
+            <ac:spMk id="8" creationId="{00000000-0000-0000-0000-000000000000}"/>
           </ac:spMkLst>
         </pc:spChg>
       </pc:sldChg>
       <pc:sldChg chg="modSp mod">
-        <pc:chgData name="Manoj Reddy Tetala" userId="d0a499fca1df3751" providerId="LiveId" clId="{844F9A02-E604-4125-9813-311D2C5B92A5}" dt="2026-10-02T03:33:53.008" v="3" actId="20577"/>
+        <pc:chgData name="Manoj Reddy Tetala" userId="d0a499fca1df3751" providerId="LiveId" clId="{844F9A02-E604-4125-9813-311D2C5B92A5}" dt="2026-10-26T10:17:09.998" v="72"/>
+        <pc:sldMkLst>
+          <pc:docMk/>
+          <pc:sldMk cId="0" sldId="257"/>
+        </pc:sldMkLst>
+        <pc:spChg chg="mod">
+          <ac:chgData name="Manoj Reddy Tetala" userId="d0a499fca1df3751" providerId="LiveId" clId="{844F9A02-E604-4125-9813-311D2C5B92A5}" dt="2026-10-26T10:17:09.998" v="72"/>
+          <ac:spMkLst>
+            <pc:docMk/>
+            <pc:sldMk cId="0" sldId="257"/>
+            <ac:spMk id="10" creationId="{00000000-0000-0000-0000-000000000000}"/>
+          </ac:spMkLst>
+        </pc:spChg>
+      </pc:sldChg>
+      <pc:sldChg chg="modSp mod">
+        <pc:chgData name="Manoj Reddy Tetala" userId="d0a499fca1df3751" providerId="LiveId" clId="{844F9A02-E604-4125-9813-311D2C5B92A5}" dt="2026-10-26T10:17:23.987" v="73"/>
+        <pc:sldMkLst>
+          <pc:docMk/>
+          <pc:sldMk cId="0" sldId="258"/>
+        </pc:sldMkLst>
+        <pc:spChg chg="mod">
+          <ac:chgData name="Manoj Reddy Tetala" userId="d0a499fca1df3751" providerId="LiveId" clId="{844F9A02-E604-4125-9813-311D2C5B92A5}" dt="2026-10-26T10:17:23.987" v="73"/>
+          <ac:spMkLst>
+            <pc:docMk/>
+            <pc:sldMk cId="0" sldId="258"/>
+            <ac:spMk id="11" creationId="{00000000-0000-0000-0000-000000000000}"/>
+          </ac:spMkLst>
+        </pc:spChg>
+      </pc:sldChg>
+      <pc:sldChg chg="modSp mod">
+        <pc:chgData name="Manoj Reddy Tetala" userId="d0a499fca1df3751" providerId="LiveId" clId="{844F9A02-E604-4125-9813-311D2C5B92A5}" dt="2026-10-26T10:17:30.153" v="74"/>
+        <pc:sldMkLst>
+          <pc:docMk/>
+          <pc:sldMk cId="86789223" sldId="259"/>
+        </pc:sldMkLst>
+        <pc:spChg chg="mod">
+          <ac:chgData name="Manoj Reddy Tetala" userId="d0a499fca1df3751" providerId="LiveId" clId="{844F9A02-E604-4125-9813-311D2C5B92A5}" dt="2026-10-26T10:17:30.153" v="74"/>
+          <ac:spMkLst>
+            <pc:docMk/>
+            <pc:sldMk cId="86789223" sldId="259"/>
+            <ac:spMk id="18" creationId="{00000000-0000-0000-0000-000000000000}"/>
+          </ac:spMkLst>
+        </pc:spChg>
+      </pc:sldChg>
+      <pc:sldChg chg="modSp mod">
+        <pc:chgData name="Manoj Reddy Tetala" userId="d0a499fca1df3751" providerId="LiveId" clId="{844F9A02-E604-4125-9813-311D2C5B92A5}" dt="2026-10-26T10:21:16.522" v="105" actId="1076"/>
+        <pc:sldMkLst>
+          <pc:docMk/>
+          <pc:sldMk cId="314495878" sldId="271"/>
+        </pc:sldMkLst>
+        <pc:spChg chg="mod">
+          <ac:chgData name="Manoj Reddy Tetala" userId="d0a499fca1df3751" providerId="LiveId" clId="{844F9A02-E604-4125-9813-311D2C5B92A5}" dt="2026-10-26T10:21:16.522" v="105" actId="1076"/>
+          <ac:spMkLst>
+            <pc:docMk/>
+            <pc:sldMk cId="314495878" sldId="271"/>
+            <ac:spMk id="12" creationId="{00000000-0000-0000-0000-000000000000}"/>
+          </ac:spMkLst>
+        </pc:spChg>
+      </pc:sldChg>
+      <pc:sldChg chg="modSp mod">
+        <pc:chgData name="Manoj Reddy Tetala" userId="d0a499fca1df3751" providerId="LiveId" clId="{844F9A02-E604-4125-9813-311D2C5B92A5}" dt="2026-10-26T10:18:07.166" v="79" actId="1076"/>
+        <pc:sldMkLst>
+          <pc:docMk/>
+          <pc:sldMk cId="4273835673" sldId="274"/>
+        </pc:sldMkLst>
+        <pc:spChg chg="mod">
+          <ac:chgData name="Manoj Reddy Tetala" userId="d0a499fca1df3751" providerId="LiveId" clId="{844F9A02-E604-4125-9813-311D2C5B92A5}" dt="2026-10-26T10:17:53.100" v="77" actId="1076"/>
+          <ac:spMkLst>
+            <pc:docMk/>
+            <pc:sldMk cId="4273835673" sldId="274"/>
+            <ac:spMk id="18" creationId="{00000000-0000-0000-0000-000000000000}"/>
+          </ac:spMkLst>
+        </pc:spChg>
+        <pc:grpChg chg="mod">
+          <ac:chgData name="Manoj Reddy Tetala" userId="d0a499fca1df3751" providerId="LiveId" clId="{844F9A02-E604-4125-9813-311D2C5B92A5}" dt="2026-10-26T10:18:07.166" v="79" actId="1076"/>
+          <ac:grpSpMkLst>
+            <pc:docMk/>
+            <pc:sldMk cId="4273835673" sldId="274"/>
+            <ac:grpSpMk id="4" creationId="{2B9EFFBF-7726-ED21-BD6C-4021B49E4438}"/>
+          </ac:grpSpMkLst>
+        </pc:grpChg>
+        <pc:picChg chg="mod">
+          <ac:chgData name="Manoj Reddy Tetala" userId="d0a499fca1df3751" providerId="LiveId" clId="{844F9A02-E604-4125-9813-311D2C5B92A5}" dt="2026-10-26T10:17:48.509" v="76" actId="1076"/>
+          <ac:picMkLst>
+            <pc:docMk/>
+            <pc:sldMk cId="4273835673" sldId="274"/>
+            <ac:picMk id="7" creationId="{5FC53D65-7751-C01A-F243-C971B8A54510}"/>
+          </ac:picMkLst>
+        </pc:picChg>
+      </pc:sldChg>
+      <pc:sldChg chg="modSp mod">
+        <pc:chgData name="Manoj Reddy Tetala" userId="d0a499fca1df3751" providerId="LiveId" clId="{844F9A02-E604-4125-9813-311D2C5B92A5}" dt="2026-10-26T10:21:02.530" v="103" actId="122"/>
+        <pc:sldMkLst>
+          <pc:docMk/>
+          <pc:sldMk cId="709256651" sldId="276"/>
+        </pc:sldMkLst>
+        <pc:spChg chg="mod">
+          <ac:chgData name="Manoj Reddy Tetala" userId="d0a499fca1df3751" providerId="LiveId" clId="{844F9A02-E604-4125-9813-311D2C5B92A5}" dt="2026-10-26T10:21:02.530" v="103" actId="122"/>
+          <ac:spMkLst>
+            <pc:docMk/>
+            <pc:sldMk cId="709256651" sldId="276"/>
+            <ac:spMk id="7" creationId="{6FF94120-5DAA-BA86-6F61-CE59BF796C68}"/>
+          </ac:spMkLst>
+        </pc:spChg>
+        <pc:spChg chg="mod">
+          <ac:chgData name="Manoj Reddy Tetala" userId="d0a499fca1df3751" providerId="LiveId" clId="{844F9A02-E604-4125-9813-311D2C5B92A5}" dt="2026-10-26T10:20:50.537" v="96" actId="1076"/>
+          <ac:spMkLst>
+            <pc:docMk/>
+            <pc:sldMk cId="709256651" sldId="276"/>
+            <ac:spMk id="18" creationId="{00000000-0000-0000-0000-000000000000}"/>
+          </ac:spMkLst>
+        </pc:spChg>
+        <pc:grpChg chg="mod">
+          <ac:chgData name="Manoj Reddy Tetala" userId="d0a499fca1df3751" providerId="LiveId" clId="{844F9A02-E604-4125-9813-311D2C5B92A5}" dt="2026-10-26T10:20:54.378" v="97" actId="1076"/>
+          <ac:grpSpMkLst>
+            <pc:docMk/>
+            <pc:sldMk cId="709256651" sldId="276"/>
+            <ac:grpSpMk id="3" creationId="{39A132B5-7282-BB0D-41D0-2D605FAF9D2A}"/>
+          </ac:grpSpMkLst>
+        </pc:grpChg>
+      </pc:sldChg>
+      <pc:sldChg chg="modSp mod">
+        <pc:chgData name="Manoj Reddy Tetala" userId="d0a499fca1df3751" providerId="LiveId" clId="{844F9A02-E604-4125-9813-311D2C5B92A5}" dt="2026-10-26T10:20:12.028" v="91" actId="122"/>
+        <pc:sldMkLst>
+          <pc:docMk/>
+          <pc:sldMk cId="1626336424" sldId="279"/>
+        </pc:sldMkLst>
+        <pc:spChg chg="mod">
+          <ac:chgData name="Manoj Reddy Tetala" userId="d0a499fca1df3751" providerId="LiveId" clId="{844F9A02-E604-4125-9813-311D2C5B92A5}" dt="2026-10-26T10:19:46.859" v="88" actId="122"/>
+          <ac:spMkLst>
+            <pc:docMk/>
+            <pc:sldMk cId="1626336424" sldId="279"/>
+            <ac:spMk id="6" creationId="{2F06FBF5-D468-2472-2E09-3659EB0BF5ED}"/>
+          </ac:spMkLst>
+        </pc:spChg>
+        <pc:spChg chg="mod">
+          <ac:chgData name="Manoj Reddy Tetala" userId="d0a499fca1df3751" providerId="LiveId" clId="{844F9A02-E604-4125-9813-311D2C5B92A5}" dt="2026-10-26T10:20:12.028" v="91" actId="122"/>
+          <ac:spMkLst>
+            <pc:docMk/>
+            <pc:sldMk cId="1626336424" sldId="279"/>
+            <ac:spMk id="18" creationId="{00000000-0000-0000-0000-000000000000}"/>
+          </ac:spMkLst>
+        </pc:spChg>
+        <pc:spChg chg="mod">
+          <ac:chgData name="Manoj Reddy Tetala" userId="d0a499fca1df3751" providerId="LiveId" clId="{844F9A02-E604-4125-9813-311D2C5B92A5}" dt="2026-10-26T10:19:46.859" v="88" actId="122"/>
+          <ac:spMkLst>
+            <pc:docMk/>
+            <pc:sldMk cId="1626336424" sldId="279"/>
+            <ac:spMk id="19" creationId="{00000000-0000-0000-0000-000000000000}"/>
+          </ac:spMkLst>
+        </pc:spChg>
+        <pc:grpChg chg="mod">
+          <ac:chgData name="Manoj Reddy Tetala" userId="d0a499fca1df3751" providerId="LiveId" clId="{844F9A02-E604-4125-9813-311D2C5B92A5}" dt="2026-10-26T10:19:38.113" v="84" actId="1076"/>
+          <ac:grpSpMkLst>
+            <pc:docMk/>
+            <pc:sldMk cId="1626336424" sldId="279"/>
+            <ac:grpSpMk id="2" creationId="{5B758792-840A-895D-A2CD-A09955CC1720}"/>
+          </ac:grpSpMkLst>
+        </pc:grpChg>
+      </pc:sldChg>
+      <pc:sldChg chg="modSp mod">
+        <pc:chgData name="Manoj Reddy Tetala" userId="d0a499fca1df3751" providerId="LiveId" clId="{844F9A02-E604-4125-9813-311D2C5B92A5}" dt="2026-10-26T10:16:33.701" v="44" actId="20577"/>
         <pc:sldMkLst>
           <pc:docMk/>
           <pc:sldMk cId="3510378788" sldId="280"/>
         </pc:sldMkLst>
         <pc:spChg chg="mod">
-          <ac:chgData name="Manoj Reddy Tetala" userId="d0a499fca1df3751" providerId="LiveId" clId="{844F9A02-E604-4125-9813-311D2C5B92A5}" dt="2026-10-02T03:33:53.008" v="3" actId="20577"/>
+          <ac:chgData name="Manoj Reddy Tetala" userId="d0a499fca1df3751" providerId="LiveId" clId="{844F9A02-E604-4125-9813-311D2C5B92A5}" dt="2026-10-26T10:16:33.701" v="44" actId="20577"/>
           <ac:spMkLst>
             <pc:docMk/>
             <pc:sldMk cId="3510378788" sldId="280"/>
-            <ac:spMk id="37" creationId="{E5120CCD-5BF6-36CF-6B16-75C2B1AFC6C7}"/>
+            <ac:spMk id="18" creationId="{00000000-0000-0000-0000-000000000000}"/>
           </ac:spMkLst>
         </pc:spChg>
       </pc:sldChg>
       <pc:sldChg chg="modSp mod">
-        <pc:chgData name="Manoj Reddy Tetala" userId="d0a499fca1df3751" providerId="LiveId" clId="{844F9A02-E604-4125-9813-311D2C5B92A5}" dt="2026-10-02T03:34:54.581" v="5" actId="20577"/>
+        <pc:chgData name="Manoj Reddy Tetala" userId="d0a499fca1df3751" providerId="LiveId" clId="{844F9A02-E604-4125-9813-311D2C5B92A5}" dt="2026-10-26T10:22:27.268" v="112" actId="255"/>
+        <pc:sldMkLst>
+          <pc:docMk/>
+          <pc:sldMk cId="3744217247" sldId="281"/>
+        </pc:sldMkLst>
+        <pc:spChg chg="mod">
+          <ac:chgData name="Manoj Reddy Tetala" userId="d0a499fca1df3751" providerId="LiveId" clId="{844F9A02-E604-4125-9813-311D2C5B92A5}" dt="2026-10-26T10:22:27.268" v="112" actId="255"/>
+          <ac:spMkLst>
+            <pc:docMk/>
+            <pc:sldMk cId="3744217247" sldId="281"/>
+            <ac:spMk id="25" creationId="{A5CA9835-2A27-E3B2-E349-E0FE4429CFBE}"/>
+          </ac:spMkLst>
+        </pc:spChg>
+      </pc:sldChg>
+      <pc:sldChg chg="modSp">
+        <pc:chgData name="Manoj Reddy Tetala" userId="d0a499fca1df3751" providerId="LiveId" clId="{844F9A02-E604-4125-9813-311D2C5B92A5}" dt="2026-10-26T10:21:42.745" v="106"/>
+        <pc:sldMkLst>
+          <pc:docMk/>
+          <pc:sldMk cId="3751606688" sldId="283"/>
+        </pc:sldMkLst>
+        <pc:spChg chg="mod">
+          <ac:chgData name="Manoj Reddy Tetala" userId="d0a499fca1df3751" providerId="LiveId" clId="{844F9A02-E604-4125-9813-311D2C5B92A5}" dt="2026-10-26T10:21:42.745" v="106"/>
+          <ac:spMkLst>
+            <pc:docMk/>
+            <pc:sldMk cId="3751606688" sldId="283"/>
+            <ac:spMk id="25" creationId="{00000000-0000-0000-0000-000000000000}"/>
+          </ac:spMkLst>
+        </pc:spChg>
+      </pc:sldChg>
+      <pc:sldChg chg="modSp mod">
+        <pc:chgData name="Manoj Reddy Tetala" userId="d0a499fca1df3751" providerId="LiveId" clId="{844F9A02-E604-4125-9813-311D2C5B92A5}" dt="2026-10-26T10:53:46.459" v="116" actId="1076"/>
         <pc:sldMkLst>
           <pc:docMk/>
           <pc:sldMk cId="49352596" sldId="284"/>
         </pc:sldMkLst>
         <pc:spChg chg="mod">
-          <ac:chgData name="Manoj Reddy Tetala" userId="d0a499fca1df3751" providerId="LiveId" clId="{844F9A02-E604-4125-9813-311D2C5B92A5}" dt="2026-10-02T03:34:54.581" v="5" actId="20577"/>
+          <ac:chgData name="Manoj Reddy Tetala" userId="d0a499fca1df3751" providerId="LiveId" clId="{844F9A02-E604-4125-9813-311D2C5B92A5}" dt="2026-10-26T10:53:32.055" v="113"/>
           <ac:spMkLst>
             <pc:docMk/>
             <pc:sldMk cId="49352596" sldId="284"/>
-            <ac:spMk id="65" creationId="{2FB61734-162A-15D4-36DC-F1D197A23651}"/>
+            <ac:spMk id="12" creationId="{00000000-0000-0000-0000-000000000000}"/>
+          </ac:spMkLst>
+        </pc:spChg>
+        <pc:grpChg chg="mod">
+          <ac:chgData name="Manoj Reddy Tetala" userId="d0a499fca1df3751" providerId="LiveId" clId="{844F9A02-E604-4125-9813-311D2C5B92A5}" dt="2026-10-26T10:53:46.459" v="116" actId="1076"/>
+          <ac:grpSpMkLst>
+            <pc:docMk/>
+            <pc:sldMk cId="49352596" sldId="284"/>
+            <ac:grpSpMk id="7" creationId="{67ACC245-70D9-3E8C-5FB8-754CFCF29BA7}"/>
+          </ac:grpSpMkLst>
+        </pc:grpChg>
+      </pc:sldChg>
+      <pc:sldChg chg="modSp mod">
+        <pc:chgData name="Manoj Reddy Tetala" userId="d0a499fca1df3751" providerId="LiveId" clId="{844F9A02-E604-4125-9813-311D2C5B92A5}" dt="2026-10-26T10:22:04.522" v="111" actId="113"/>
+        <pc:sldMkLst>
+          <pc:docMk/>
+          <pc:sldMk cId="0" sldId="285"/>
+        </pc:sldMkLst>
+        <pc:spChg chg="mod">
+          <ac:chgData name="Manoj Reddy Tetala" userId="d0a499fca1df3751" providerId="LiveId" clId="{844F9A02-E604-4125-9813-311D2C5B92A5}" dt="2026-10-26T10:22:04.522" v="111" actId="113"/>
+          <ac:spMkLst>
+            <pc:docMk/>
+            <pc:sldMk cId="0" sldId="285"/>
+            <ac:spMk id="9" creationId="{00000000-0000-0000-0000-000000000000}"/>
           </ac:spMkLst>
         </pc:spChg>
       </pc:sldChg>
@@ -1285,7 +1507,7 @@
             <a:fld id="{0B419B0A-DB98-47ED-A0D2-B47FD394FE07}" type="datetimeFigureOut">
               <a:rPr lang="en-IN" smtClean="0"/>
               <a:pPr/>
-              <a:t>02-10-2026</a:t>
+              <a:t>26-10-2026</a:t>
             </a:fld>
             <a:endParaRPr lang="en-IN"/>
           </a:p>
@@ -1900,7 +2122,7 @@
             <a:fld id="{1D8BD707-D9CF-40AE-B4C6-C98DA3205C09}" type="datetimeFigureOut">
               <a:rPr lang="en-US"/>
               <a:pPr/>
-              <a:t>10/2/2026</a:t>
+              <a:t>10/26/2026</a:t>
             </a:fld>
             <a:endParaRPr lang="en-US"/>
           </a:p>
@@ -2080,7 +2302,7 @@
             <a:fld id="{1D8BD707-D9CF-40AE-B4C6-C98DA3205C09}" type="datetimeFigureOut">
               <a:rPr lang="en-US"/>
               <a:pPr/>
-              <a:t>10/2/2026</a:t>
+              <a:t>10/26/2026</a:t>
             </a:fld>
             <a:endParaRPr lang="en-US"/>
           </a:p>
@@ -2297,7 +2519,7 @@
             <a:fld id="{1D8BD707-D9CF-40AE-B4C6-C98DA3205C09}" type="datetimeFigureOut">
               <a:rPr lang="en-US"/>
               <a:pPr/>
-              <a:t>10/2/2026</a:t>
+              <a:t>10/26/2026</a:t>
             </a:fld>
             <a:endParaRPr lang="en-US"/>
           </a:p>
@@ -2448,7 +2670,7 @@
             <a:fld id="{1D8BD707-D9CF-40AE-B4C6-C98DA3205C09}" type="datetimeFigureOut">
               <a:rPr lang="en-US"/>
               <a:pPr/>
-              <a:t>10/2/2026</a:t>
+              <a:t>10/26/2026</a:t>
             </a:fld>
             <a:endParaRPr lang="en-US"/>
           </a:p>
@@ -2764,7 +2986,7 @@
             <a:fld id="{1D8BD707-D9CF-40AE-B4C6-C98DA3205C09}" type="datetimeFigureOut">
               <a:rPr lang="en-US"/>
               <a:pPr/>
-              <a:t>10/2/2026</a:t>
+              <a:t>10/26/2026</a:t>
             </a:fld>
             <a:endParaRPr lang="en-US"/>
           </a:p>
@@ -2992,7 +3214,7 @@
             <a:fld id="{1D8BD707-D9CF-40AE-B4C6-C98DA3205C09}" type="datetimeFigureOut">
               <a:rPr lang="en-US"/>
               <a:pPr/>
-              <a:t>10/2/2026</a:t>
+              <a:t>10/26/2026</a:t>
             </a:fld>
             <a:endParaRPr lang="en-US"/>
           </a:p>
@@ -3429,7 +3651,7 @@
                 <a:latin typeface="Times New Roman" pitchFamily="18" charset="0"/>
                 <a:cs typeface="Times New Roman" pitchFamily="18" charset="0"/>
               </a:rPr>
-              <a:t>K.SURYA(25B11CS002)</a:t>
+              <a:t>T.MANOJ REDDY(25B11CS946)</a:t>
             </a:r>
           </a:p>
           <a:p>
@@ -3449,7 +3671,7 @@
                 <a:latin typeface="Times New Roman" pitchFamily="18" charset="0"/>
                 <a:cs typeface="Times New Roman" pitchFamily="18" charset="0"/>
               </a:rPr>
-              <a:t>A.DIVIJA(25B11CS005)</a:t>
+              <a:t>K.SURYA(25B11CS002)</a:t>
             </a:r>
           </a:p>
           <a:p>
@@ -3469,7 +3691,7 @@
                 <a:latin typeface="Times New Roman" pitchFamily="18" charset="0"/>
                 <a:cs typeface="Times New Roman" pitchFamily="18" charset="0"/>
               </a:rPr>
-              <a:t>SANA JASWANTHI(25B11CS845)</a:t>
+              <a:t>A.DIVIJA(25B11CS005)</a:t>
             </a:r>
           </a:p>
           <a:p>
@@ -3489,7 +3711,7 @@
                 <a:latin typeface="Times New Roman" pitchFamily="18" charset="0"/>
                 <a:cs typeface="Times New Roman" pitchFamily="18" charset="0"/>
               </a:rPr>
-              <a:t>T.MANOJ REDDY(25B11CS946)</a:t>
+              <a:t>S. JASWANTHI(25B11CS845)</a:t>
             </a:r>
           </a:p>
           <a:p>
@@ -3529,7 +3751,7 @@
         </p:nvSpPr>
         <p:spPr>
           <a:xfrm>
-            <a:off x="914400" y="6446520"/>
+            <a:off x="884624" y="5894010"/>
             <a:ext cx="8229600" cy="400110"/>
           </a:xfrm>
           <a:prstGeom prst="rect">
@@ -3871,7 +4093,7 @@
         <p:spPr>
           <a:xfrm>
             <a:off x="2586213" y="413290"/>
-            <a:ext cx="5029200" cy="400110"/>
+            <a:ext cx="5029200" cy="430887"/>
           </a:xfrm>
           <a:prstGeom prst="rect">
             <a:avLst/>
@@ -3896,7 +4118,7 @@
               </a:defRPr>
             </a:pPr>
             <a:r>
-              <a:rPr lang="en-IN" sz="2000" dirty="0">
+              <a:rPr lang="en-IN" sz="2200" dirty="0">
                 <a:solidFill>
                   <a:schemeClr val="bg1"/>
                 </a:solidFill>
@@ -4728,15 +4950,8 @@
                 <a:latin typeface="Times New Roman" pitchFamily="18" charset="0"/>
                 <a:cs typeface="Times New Roman" pitchFamily="18" charset="0"/>
               </a:rPr>
-              <a:t>Data Visualization</a:t>
-            </a:r>
-            <a:endParaRPr dirty="0">
-              <a:solidFill>
-                <a:schemeClr val="bg1"/>
-              </a:solidFill>
-              <a:latin typeface="Times New Roman" pitchFamily="18" charset="0"/>
-              <a:cs typeface="Times New Roman" pitchFamily="18" charset="0"/>
-            </a:endParaRPr>
+              <a:t>DATA VISUALIZATION</a:t>
+            </a:r>
           </a:p>
         </p:txBody>
       </p:sp>
@@ -5151,8 +5366,8 @@
         </p:nvSpPr>
         <p:spPr>
           <a:xfrm>
-            <a:off x="3429000" y="152400"/>
-            <a:ext cx="3265998" cy="830997"/>
+            <a:off x="2921913" y="196401"/>
+            <a:ext cx="4214574" cy="769441"/>
           </a:xfrm>
           <a:prstGeom prst="rect">
             <a:avLst/>
@@ -5167,18 +5382,18 @@
           <a:p>
             <a:pPr algn="ctr"/>
             <a:r>
-              <a:rPr lang="en-IN" sz="2400" dirty="0">
+              <a:rPr lang="en-IN" sz="2200" b="1" dirty="0">
                 <a:solidFill>
                   <a:schemeClr val="bg1"/>
                 </a:solidFill>
                 <a:latin typeface="Times New Roman" pitchFamily="18" charset="0"/>
                 <a:cs typeface="Times New Roman" pitchFamily="18" charset="0"/>
               </a:rPr>
-              <a:t>Key Insights &amp; Analysis</a:t>
-            </a:r>
-          </a:p>
-          <a:p>
-            <a:endParaRPr lang="en-US" sz="2400" dirty="0"/>
+              <a:t>KEY INSIGHTS &amp; ANALYSIS</a:t>
+            </a:r>
+          </a:p>
+          <a:p>
+            <a:endParaRPr lang="en-US" sz="2200" b="1" dirty="0"/>
           </a:p>
         </p:txBody>
       </p:sp>
@@ -5489,8 +5704,8 @@
         </p:nvGrpSpPr>
         <p:grpSpPr>
           <a:xfrm>
-            <a:off x="2477248" y="152400"/>
-            <a:ext cx="5103904" cy="1198311"/>
+            <a:off x="2354136" y="183595"/>
+            <a:ext cx="5531372" cy="1198311"/>
             <a:chOff x="2648188" y="47148"/>
             <a:chExt cx="5103904" cy="1198311"/>
           </a:xfrm>
@@ -5726,14 +5941,14 @@
               </a:defRPr>
             </a:pPr>
             <a:r>
-              <a:rPr dirty="0">
+              <a:rPr lang="en-US" dirty="0">
                 <a:solidFill>
                   <a:schemeClr val="bg1"/>
                 </a:solidFill>
                 <a:latin typeface="Times New Roman" pitchFamily="18" charset="0"/>
                 <a:cs typeface="Times New Roman" pitchFamily="18" charset="0"/>
               </a:rPr>
-              <a:t>Implementation Workflow</a:t>
+              <a:t>IMPLEMENTATION WORKFLOW</a:t>
             </a:r>
           </a:p>
         </p:txBody>
@@ -8374,15 +8589,8 @@
                 <a:latin typeface="Times New Roman" pitchFamily="18" charset="0"/>
                 <a:cs typeface="Times New Roman" pitchFamily="18" charset="0"/>
               </a:rPr>
-              <a:t>Contents</a:t>
-            </a:r>
-            <a:endParaRPr dirty="0">
-              <a:solidFill>
-                <a:schemeClr val="bg1"/>
-              </a:solidFill>
-              <a:latin typeface="Times New Roman" pitchFamily="18" charset="0"/>
-              <a:cs typeface="Times New Roman" pitchFamily="18" charset="0"/>
-            </a:endParaRPr>
+              <a:t>CONTENTS</a:t>
+            </a:r>
           </a:p>
         </p:txBody>
       </p:sp>
@@ -8895,7 +9103,7 @@
               </a:defRPr>
             </a:pPr>
             <a:r>
-              <a:rPr dirty="0">
+              <a:rPr lang="en-US" dirty="0">
                 <a:solidFill>
                   <a:schemeClr val="bg1"/>
                 </a:solidFill>
@@ -9314,14 +9522,14 @@
               </a:defRPr>
             </a:pPr>
             <a:r>
-              <a:rPr dirty="0">
+              <a:rPr lang="en-US" dirty="0">
                 <a:solidFill>
                   <a:schemeClr val="bg1"/>
                 </a:solidFill>
                 <a:latin typeface="Times New Roman" pitchFamily="18" charset="0"/>
                 <a:cs typeface="Times New Roman" pitchFamily="18" charset="0"/>
               </a:rPr>
-              <a:t>Introduction</a:t>
+              <a:t>INTRODUCTION</a:t>
             </a:r>
           </a:p>
         </p:txBody>
@@ -9494,8 +9702,8 @@
         </p:nvGrpSpPr>
         <p:grpSpPr>
           <a:xfrm>
-            <a:off x="2667000" y="85008"/>
-            <a:ext cx="5103904" cy="1198311"/>
+            <a:off x="2619784" y="63329"/>
+            <a:ext cx="5334000" cy="1198311"/>
             <a:chOff x="2648188" y="47148"/>
             <a:chExt cx="5103904" cy="1198311"/>
           </a:xfrm>
@@ -9576,7 +9784,7 @@
           </p:blipFill>
           <p:spPr>
             <a:xfrm>
-              <a:off x="2828925" y="243549"/>
+              <a:off x="2830942" y="266940"/>
               <a:ext cx="4585268" cy="522565"/>
             </a:xfrm>
             <a:prstGeom prst="rect">
@@ -9725,7 +9933,7 @@
         </p:nvSpPr>
         <p:spPr>
           <a:xfrm>
-            <a:off x="2667000" y="304800"/>
+            <a:off x="2589304" y="339794"/>
             <a:ext cx="5181600" cy="430887"/>
           </a:xfrm>
           <a:prstGeom prst="rect">
@@ -9751,14 +9959,14 @@
               </a:defRPr>
             </a:pPr>
             <a:r>
-              <a:rPr dirty="0">
+              <a:rPr lang="en-US" dirty="0">
                 <a:solidFill>
                   <a:schemeClr val="bg1"/>
                 </a:solidFill>
                 <a:latin typeface="Times New Roman" pitchFamily="18" charset="0"/>
                 <a:cs typeface="Times New Roman" pitchFamily="18" charset="0"/>
               </a:rPr>
-              <a:t>Current / Manual Approach</a:t>
+              <a:t>CURRENT / MANUAL APPROACH</a:t>
             </a:r>
           </a:p>
         </p:txBody>
@@ -9985,8 +10193,8 @@
         </p:nvGrpSpPr>
         <p:grpSpPr>
           <a:xfrm>
-            <a:off x="2743200" y="0"/>
-            <a:ext cx="5103904" cy="1198311"/>
+            <a:off x="2209800" y="87763"/>
+            <a:ext cx="6858000" cy="1198311"/>
             <a:chOff x="2648188" y="47148"/>
             <a:chExt cx="5103904" cy="1198311"/>
           </a:xfrm>
@@ -10188,8 +10396,8 @@
         </p:nvSpPr>
         <p:spPr>
           <a:xfrm>
-            <a:off x="2743200" y="256032"/>
-            <a:ext cx="5120640" cy="430887"/>
+            <a:off x="2476500" y="300038"/>
+            <a:ext cx="6324600" cy="430887"/>
           </a:xfrm>
           <a:prstGeom prst="rect">
             <a:avLst/>
@@ -10214,14 +10422,14 @@
               </a:defRPr>
             </a:pPr>
             <a:r>
-              <a:rPr dirty="0">
+              <a:rPr lang="en-US" dirty="0">
                 <a:solidFill>
                   <a:schemeClr val="bg1"/>
                 </a:solidFill>
                 <a:latin typeface="Times New Roman" pitchFamily="18" charset="0"/>
                 <a:cs typeface="Times New Roman" pitchFamily="18" charset="0"/>
               </a:rPr>
-              <a:t>Limitations of Manual Analysis</a:t>
+              <a:t>LIMITATIONS OF MANUAL ANALYSIS</a:t>
             </a:r>
           </a:p>
         </p:txBody>
@@ -10463,7 +10671,7 @@
         </p:nvGrpSpPr>
         <p:grpSpPr>
           <a:xfrm>
-            <a:off x="2743200" y="204311"/>
+            <a:off x="2724116" y="204311"/>
             <a:ext cx="4997767" cy="1092279"/>
             <a:chOff x="2703195" y="86439"/>
             <a:chExt cx="4997767" cy="1092279"/>
@@ -10625,6 +10833,7 @@
             <a:bodyPr wrap="square" lIns="0" tIns="0" rIns="0" bIns="0" rtlCol="0"/>
             <a:lstStyle/>
             <a:p>
+              <a:pPr algn="ctr"/>
               <a:endParaRPr dirty="0"/>
             </a:p>
           </p:txBody>
@@ -10638,7 +10847,7 @@
         </p:nvSpPr>
         <p:spPr>
           <a:xfrm>
-            <a:off x="2743200" y="374808"/>
+            <a:off x="2662680" y="361421"/>
             <a:ext cx="5120640" cy="430887"/>
           </a:xfrm>
           <a:prstGeom prst="rect">
@@ -10664,14 +10873,14 @@
               </a:defRPr>
             </a:pPr>
             <a:r>
-              <a:rPr dirty="0">
+              <a:rPr lang="en-US" dirty="0">
                 <a:solidFill>
                   <a:schemeClr val="bg1"/>
                 </a:solidFill>
                 <a:latin typeface="Times New Roman" pitchFamily="18" charset="0"/>
                 <a:cs typeface="Times New Roman" pitchFamily="18" charset="0"/>
               </a:rPr>
-              <a:t>Proposed Approach</a:t>
+              <a:t>PROPOSED APPROACH</a:t>
             </a:r>
           </a:p>
         </p:txBody>
@@ -11188,8 +11397,25 @@
                 <a:latin typeface="Times New Roman" pitchFamily="18" charset="0"/>
                 <a:cs typeface="Times New Roman" pitchFamily="18" charset="0"/>
               </a:rPr>
-              <a:t>DATASET DESCRIPTION</a:t>
-            </a:r>
+              <a:t>DATASET D</a:t>
+            </a:r>
+            <a:r>
+              <a:rPr lang="en-US" dirty="0">
+                <a:solidFill>
+                  <a:schemeClr val="bg1"/>
+                </a:solidFill>
+                <a:latin typeface="Times New Roman" pitchFamily="18" charset="0"/>
+                <a:cs typeface="Times New Roman" pitchFamily="18" charset="0"/>
+              </a:rPr>
+              <a:t>ESCRIPTION</a:t>
+            </a:r>
+            <a:endParaRPr dirty="0">
+              <a:solidFill>
+                <a:schemeClr val="bg1"/>
+              </a:solidFill>
+              <a:latin typeface="Times New Roman" pitchFamily="18" charset="0"/>
+              <a:cs typeface="Times New Roman" pitchFamily="18" charset="0"/>
+            </a:endParaRPr>
           </a:p>
         </p:txBody>
       </p:sp>
@@ -12438,8 +12664,8 @@
         </p:nvSpPr>
         <p:spPr>
           <a:xfrm>
-            <a:off x="2414826" y="437450"/>
-            <a:ext cx="5120640" cy="400110"/>
+            <a:off x="2520919" y="372676"/>
+            <a:ext cx="5120640" cy="430887"/>
           </a:xfrm>
           <a:prstGeom prst="rect">
             <a:avLst/>
@@ -12464,7 +12690,7 @@
               </a:defRPr>
             </a:pPr>
             <a:r>
-              <a:rPr sz="2000" dirty="0">
+              <a:rPr sz="2200" dirty="0">
                 <a:solidFill>
                   <a:schemeClr val="bg1"/>
                 </a:solidFill>

--- a/PPTs/REVIEW - 2.pptx
+++ b/PPTs/REVIEW - 2.pptx
@@ -5,7 +5,7 @@
     <p:sldMasterId id="2147483648" r:id="rId1"/>
   </p:sldMasterIdLst>
   <p:notesMasterIdLst>
-    <p:notesMasterId r:id="rId17"/>
+    <p:notesMasterId r:id="rId16"/>
   </p:notesMasterIdLst>
   <p:sldIdLst>
     <p:sldId id="256" r:id="rId2"/>
@@ -20,9 +20,8 @@
     <p:sldId id="281" r:id="rId11"/>
     <p:sldId id="283" r:id="rId12"/>
     <p:sldId id="285" r:id="rId13"/>
-    <p:sldId id="284" r:id="rId14"/>
-    <p:sldId id="268" r:id="rId15"/>
-    <p:sldId id="269" r:id="rId16"/>
+    <p:sldId id="268" r:id="rId14"/>
+    <p:sldId id="269" r:id="rId15"/>
   </p:sldIdLst>
   <p:sldSz cx="10058400" cy="7772400"/>
   <p:notesSz cx="10058400" cy="7772400"/>
@@ -50,20 +49,12 @@
 </p:presentation>
 </file>
 
-<file path=ppt/revisionInfo.xml><?xml version="1.0" encoding="utf-8"?>
-<p1510:revInfo xmlns:a="http://schemas.openxmlformats.org/drawingml/2006/main" xmlns:r="http://schemas.openxmlformats.org/officeDocument/2006/relationships" xmlns:p1510="http://schemas.microsoft.com/office/powerpoint/2015/10/main">
-  <p1510:revLst>
-    <p1510:client id="{CEEAF994-60F2-4477-B613-2FD40557E5F4}" v="10" dt="2026-10-26T10:53:32.057"/>
-  </p1510:revLst>
-</p1510:revInfo>
-</file>
-
 <file path=ppt/changesInfos/changesInfo1.xml><?xml version="1.0" encoding="utf-8"?>
 <pc:chgInfo xmlns:a="http://schemas.openxmlformats.org/drawingml/2006/main" xmlns:r="http://schemas.openxmlformats.org/officeDocument/2006/relationships" xmlns:ac="http://schemas.microsoft.com/office/drawing/2013/main/command" xmlns:pc="http://schemas.microsoft.com/office/powerpoint/2013/main/command">
   <pc:docChgLst>
     <pc:chgData name="Manoj Reddy Tetala" userId="d0a499fca1df3751" providerId="LiveId" clId="{844F9A02-E604-4125-9813-311D2C5B92A5}"/>
-    <pc:docChg chg="undo custSel modSld">
-      <pc:chgData name="Manoj Reddy Tetala" userId="d0a499fca1df3751" providerId="LiveId" clId="{844F9A02-E604-4125-9813-311D2C5B92A5}" dt="2026-10-26T10:54:21.252" v="117" actId="1076"/>
+    <pc:docChg chg="undo custSel delSld modSld">
+      <pc:chgData name="Manoj Reddy Tetala" userId="d0a499fca1df3751" providerId="LiveId" clId="{844F9A02-E604-4125-9813-311D2C5B92A5}" dt="2026-10-29T14:55:10.002" v="118" actId="47"/>
       <pc:docMkLst>
         <pc:docMk/>
       </pc:docMkLst>
@@ -288,28 +279,12 @@
           </ac:spMkLst>
         </pc:spChg>
       </pc:sldChg>
-      <pc:sldChg chg="modSp mod">
-        <pc:chgData name="Manoj Reddy Tetala" userId="d0a499fca1df3751" providerId="LiveId" clId="{844F9A02-E604-4125-9813-311D2C5B92A5}" dt="2026-10-26T10:53:46.459" v="116" actId="1076"/>
+      <pc:sldChg chg="modSp del mod">
+        <pc:chgData name="Manoj Reddy Tetala" userId="d0a499fca1df3751" providerId="LiveId" clId="{844F9A02-E604-4125-9813-311D2C5B92A5}" dt="2026-10-29T14:55:10.002" v="118" actId="47"/>
         <pc:sldMkLst>
           <pc:docMk/>
           <pc:sldMk cId="49352596" sldId="284"/>
         </pc:sldMkLst>
-        <pc:spChg chg="mod">
-          <ac:chgData name="Manoj Reddy Tetala" userId="d0a499fca1df3751" providerId="LiveId" clId="{844F9A02-E604-4125-9813-311D2C5B92A5}" dt="2026-10-26T10:53:32.055" v="113"/>
-          <ac:spMkLst>
-            <pc:docMk/>
-            <pc:sldMk cId="49352596" sldId="284"/>
-            <ac:spMk id="12" creationId="{00000000-0000-0000-0000-000000000000}"/>
-          </ac:spMkLst>
-        </pc:spChg>
-        <pc:grpChg chg="mod">
-          <ac:chgData name="Manoj Reddy Tetala" userId="d0a499fca1df3751" providerId="LiveId" clId="{844F9A02-E604-4125-9813-311D2C5B92A5}" dt="2026-10-26T10:53:46.459" v="116" actId="1076"/>
-          <ac:grpSpMkLst>
-            <pc:docMk/>
-            <pc:sldMk cId="49352596" sldId="284"/>
-            <ac:grpSpMk id="7" creationId="{67ACC245-70D9-3E8C-5FB8-754CFCF29BA7}"/>
-          </ac:grpSpMkLst>
-        </pc:grpChg>
       </pc:sldChg>
       <pc:sldChg chg="modSp mod">
         <pc:chgData name="Manoj Reddy Tetala" userId="d0a499fca1df3751" providerId="LiveId" clId="{844F9A02-E604-4125-9813-311D2C5B92A5}" dt="2026-10-26T10:22:04.522" v="111" actId="113"/>
@@ -1507,7 +1482,7 @@
             <a:fld id="{0B419B0A-DB98-47ED-A0D2-B47FD394FE07}" type="datetimeFigureOut">
               <a:rPr lang="en-IN" smtClean="0"/>
               <a:pPr/>
-              <a:t>26-10-2026</a:t>
+              <a:t>29-10-2026</a:t>
             </a:fld>
             <a:endParaRPr lang="en-IN"/>
           </a:p>
@@ -2122,7 +2097,7 @@
             <a:fld id="{1D8BD707-D9CF-40AE-B4C6-C98DA3205C09}" type="datetimeFigureOut">
               <a:rPr lang="en-US"/>
               <a:pPr/>
-              <a:t>10/26/2026</a:t>
+              <a:t>10/29/2026</a:t>
             </a:fld>
             <a:endParaRPr lang="en-US"/>
           </a:p>
@@ -2302,7 +2277,7 @@
             <a:fld id="{1D8BD707-D9CF-40AE-B4C6-C98DA3205C09}" type="datetimeFigureOut">
               <a:rPr lang="en-US"/>
               <a:pPr/>
-              <a:t>10/26/2026</a:t>
+              <a:t>10/29/2026</a:t>
             </a:fld>
             <a:endParaRPr lang="en-US"/>
           </a:p>
@@ -2519,7 +2494,7 @@
             <a:fld id="{1D8BD707-D9CF-40AE-B4C6-C98DA3205C09}" type="datetimeFigureOut">
               <a:rPr lang="en-US"/>
               <a:pPr/>
-              <a:t>10/26/2026</a:t>
+              <a:t>10/29/2026</a:t>
             </a:fld>
             <a:endParaRPr lang="en-US"/>
           </a:p>
@@ -2670,7 +2645,7 @@
             <a:fld id="{1D8BD707-D9CF-40AE-B4C6-C98DA3205C09}" type="datetimeFigureOut">
               <a:rPr lang="en-US"/>
               <a:pPr/>
-              <a:t>10/26/2026</a:t>
+              <a:t>10/29/2026</a:t>
             </a:fld>
             <a:endParaRPr lang="en-US"/>
           </a:p>
@@ -2986,7 +2961,7 @@
             <a:fld id="{1D8BD707-D9CF-40AE-B4C6-C98DA3205C09}" type="datetimeFigureOut">
               <a:rPr lang="en-US"/>
               <a:pPr/>
-              <a:t>10/26/2026</a:t>
+              <a:t>10/29/2026</a:t>
             </a:fld>
             <a:endParaRPr lang="en-US"/>
           </a:p>
@@ -3214,7 +3189,7 @@
             <a:fld id="{1D8BD707-D9CF-40AE-B4C6-C98DA3205C09}" type="datetimeFigureOut">
               <a:rPr lang="en-US"/>
               <a:pPr/>
-              <a:t>10/26/2026</a:t>
+              <a:t>10/29/2026</a:t>
             </a:fld>
             <a:endParaRPr lang="en-US"/>
           </a:p>
@@ -5638,1531 +5613,6 @@
           <a:chExt cx="0" cy="0"/>
         </a:xfrm>
       </p:grpSpPr>
-      <p:sp>
-        <p:nvSpPr>
-          <p:cNvPr id="75" name="Rounded Rectangle 10">
-            <a:extLst>
-              <a:ext uri="{FF2B5EF4-FFF2-40B4-BE49-F238E27FC236}">
-                <a16:creationId xmlns:a16="http://schemas.microsoft.com/office/drawing/2014/main" id="{6317F1E6-20B3-1F48-3BD3-6BC0C628B341}"/>
-              </a:ext>
-            </a:extLst>
-          </p:cNvPr>
-          <p:cNvSpPr/>
-          <p:nvPr/>
-        </p:nvSpPr>
-        <p:spPr>
-          <a:xfrm>
-            <a:off x="3317618" y="2798870"/>
-            <a:ext cx="2859284" cy="1078992"/>
-          </a:xfrm>
-          <a:prstGeom prst="roundRect">
-            <a:avLst/>
-          </a:prstGeom>
-          <a:solidFill>
-            <a:srgbClr val="EBF4FD"/>
-          </a:solidFill>
-          <a:ln>
-            <a:solidFill>
-              <a:srgbClr val="EBF4FD"/>
-            </a:solidFill>
-          </a:ln>
-        </p:spPr>
-        <p:style>
-          <a:lnRef idx="1">
-            <a:schemeClr val="accent1"/>
-          </a:lnRef>
-          <a:fillRef idx="3">
-            <a:schemeClr val="accent1"/>
-          </a:fillRef>
-          <a:effectRef idx="2">
-            <a:schemeClr val="accent1"/>
-          </a:effectRef>
-          <a:fontRef idx="minor">
-            <a:schemeClr val="lt1"/>
-          </a:fontRef>
-        </p:style>
-        <p:txBody>
-          <a:bodyPr rtlCol="0" anchor="ctr"/>
-          <a:lstStyle/>
-          <a:p>
-            <a:pPr algn="ctr"/>
-            <a:endParaRPr/>
-          </a:p>
-        </p:txBody>
-      </p:sp>
-      <p:grpSp>
-        <p:nvGrpSpPr>
-          <p:cNvPr id="7" name="object 3">
-            <a:extLst>
-              <a:ext uri="{FF2B5EF4-FFF2-40B4-BE49-F238E27FC236}">
-                <a16:creationId xmlns:a16="http://schemas.microsoft.com/office/drawing/2014/main" id="{67ACC245-70D9-3E8C-5FB8-754CFCF29BA7}"/>
-              </a:ext>
-            </a:extLst>
-          </p:cNvPr>
-          <p:cNvGrpSpPr/>
-          <p:nvPr/>
-        </p:nvGrpSpPr>
-        <p:grpSpPr>
-          <a:xfrm>
-            <a:off x="2354136" y="183595"/>
-            <a:ext cx="5531372" cy="1198311"/>
-            <a:chOff x="2648188" y="47148"/>
-            <a:chExt cx="5103904" cy="1198311"/>
-          </a:xfrm>
-        </p:grpSpPr>
-        <p:pic>
-          <p:nvPicPr>
-            <p:cNvPr id="8" name="object 4">
-              <a:extLst>
-                <a:ext uri="{FF2B5EF4-FFF2-40B4-BE49-F238E27FC236}">
-                  <a16:creationId xmlns:a16="http://schemas.microsoft.com/office/drawing/2014/main" id="{6520D471-D4E5-A862-75B1-D9BCC13CCE76}"/>
-                </a:ext>
-              </a:extLst>
-            </p:cNvPr>
-            <p:cNvPicPr/>
-            <p:nvPr/>
-          </p:nvPicPr>
-          <p:blipFill>
-            <a:blip r:embed="rId2" cstate="print"/>
-            <a:stretch>
-              <a:fillRect/>
-            </a:stretch>
-          </p:blipFill>
-          <p:spPr>
-            <a:xfrm>
-              <a:off x="2648188" y="47148"/>
-              <a:ext cx="5103904" cy="1198311"/>
-            </a:xfrm>
-            <a:prstGeom prst="rect">
-              <a:avLst/>
-            </a:prstGeom>
-          </p:spPr>
-        </p:pic>
-        <p:pic>
-          <p:nvPicPr>
-            <p:cNvPr id="9" name="object 5">
-              <a:extLst>
-                <a:ext uri="{FF2B5EF4-FFF2-40B4-BE49-F238E27FC236}">
-                  <a16:creationId xmlns:a16="http://schemas.microsoft.com/office/drawing/2014/main" id="{AD22DAB3-C37B-1766-28C4-6EB13F7079CD}"/>
-                </a:ext>
-              </a:extLst>
-            </p:cNvPr>
-            <p:cNvPicPr/>
-            <p:nvPr/>
-          </p:nvPicPr>
-          <p:blipFill>
-            <a:blip r:embed="rId3" cstate="print"/>
-            <a:stretch>
-              <a:fillRect/>
-            </a:stretch>
-          </p:blipFill>
-          <p:spPr>
-            <a:xfrm>
-              <a:off x="2703195" y="86439"/>
-              <a:ext cx="4997767" cy="1092279"/>
-            </a:xfrm>
-            <a:prstGeom prst="rect">
-              <a:avLst/>
-            </a:prstGeom>
-          </p:spPr>
-        </p:pic>
-        <p:pic>
-          <p:nvPicPr>
-            <p:cNvPr id="10" name="object 6">
-              <a:extLst>
-                <a:ext uri="{FF2B5EF4-FFF2-40B4-BE49-F238E27FC236}">
-                  <a16:creationId xmlns:a16="http://schemas.microsoft.com/office/drawing/2014/main" id="{CDC96198-DF83-D7E8-5187-D35038090D7B}"/>
-                </a:ext>
-              </a:extLst>
-            </p:cNvPr>
-            <p:cNvPicPr/>
-            <p:nvPr/>
-          </p:nvPicPr>
-          <p:blipFill>
-            <a:blip r:embed="rId4" cstate="print"/>
-            <a:stretch>
-              <a:fillRect/>
-            </a:stretch>
-          </p:blipFill>
-          <p:spPr>
-            <a:xfrm>
-              <a:off x="2828925" y="243549"/>
-              <a:ext cx="4585268" cy="522565"/>
-            </a:xfrm>
-            <a:prstGeom prst="rect">
-              <a:avLst/>
-            </a:prstGeom>
-          </p:spPr>
-        </p:pic>
-        <p:sp>
-          <p:nvSpPr>
-            <p:cNvPr id="11" name="object 7">
-              <a:extLst>
-                <a:ext uri="{FF2B5EF4-FFF2-40B4-BE49-F238E27FC236}">
-                  <a16:creationId xmlns:a16="http://schemas.microsoft.com/office/drawing/2014/main" id="{BAA191BE-B616-456E-A32A-06C5D11989B1}"/>
-                </a:ext>
-              </a:extLst>
-            </p:cNvPr>
-            <p:cNvSpPr/>
-            <p:nvPr/>
-          </p:nvSpPr>
-          <p:spPr>
-            <a:xfrm>
-              <a:off x="2828925" y="282892"/>
-              <a:ext cx="4534295" cy="416559"/>
-            </a:xfrm>
-            <a:custGeom>
-              <a:avLst/>
-              <a:gdLst/>
-              <a:ahLst/>
-              <a:cxnLst/>
-              <a:rect l="l" t="t" r="r" b="b"/>
-              <a:pathLst>
-                <a:path w="4479290" h="416559">
-                  <a:moveTo>
-                    <a:pt x="4394158" y="0"/>
-                  </a:moveTo>
-                  <a:lnTo>
-                    <a:pt x="84972" y="0"/>
-                  </a:lnTo>
-                  <a:lnTo>
-                    <a:pt x="51863" y="5448"/>
-                  </a:lnTo>
-                  <a:lnTo>
-                    <a:pt x="24831" y="20326"/>
-                  </a:lnTo>
-                  <a:lnTo>
-                    <a:pt x="6705" y="42329"/>
-                  </a:lnTo>
-                  <a:lnTo>
-                    <a:pt x="0" y="69361"/>
-                  </a:lnTo>
-                  <a:lnTo>
-                    <a:pt x="0" y="346910"/>
-                  </a:lnTo>
-                  <a:lnTo>
-                    <a:pt x="6705" y="373941"/>
-                  </a:lnTo>
-                  <a:lnTo>
-                    <a:pt x="24831" y="395944"/>
-                  </a:lnTo>
-                  <a:lnTo>
-                    <a:pt x="51863" y="410822"/>
-                  </a:lnTo>
-                  <a:lnTo>
-                    <a:pt x="84972" y="416271"/>
-                  </a:lnTo>
-                  <a:lnTo>
-                    <a:pt x="4394158" y="416271"/>
-                  </a:lnTo>
-                  <a:lnTo>
-                    <a:pt x="4427267" y="410822"/>
-                  </a:lnTo>
-                  <a:lnTo>
-                    <a:pt x="4454299" y="395944"/>
-                  </a:lnTo>
-                  <a:lnTo>
-                    <a:pt x="4472425" y="373941"/>
-                  </a:lnTo>
-                  <a:lnTo>
-                    <a:pt x="4479131" y="346910"/>
-                  </a:lnTo>
-                  <a:lnTo>
-                    <a:pt x="4479131" y="69361"/>
-                  </a:lnTo>
-                  <a:lnTo>
-                    <a:pt x="4472425" y="42329"/>
-                  </a:lnTo>
-                  <a:lnTo>
-                    <a:pt x="4454299" y="20326"/>
-                  </a:lnTo>
-                  <a:lnTo>
-                    <a:pt x="4427267" y="5448"/>
-                  </a:lnTo>
-                  <a:lnTo>
-                    <a:pt x="4394158" y="0"/>
-                  </a:lnTo>
-                  <a:close/>
-                </a:path>
-              </a:pathLst>
-            </a:custGeom>
-            <a:solidFill>
-              <a:srgbClr val="FF6600"/>
-            </a:solidFill>
-          </p:spPr>
-          <p:txBody>
-            <a:bodyPr wrap="square" lIns="0" tIns="0" rIns="0" bIns="0" rtlCol="0"/>
-            <a:lstStyle/>
-            <a:p>
-              <a:r>
-                <a:rPr lang="en-US" dirty="0"/>
-                <a:t>                     </a:t>
-              </a:r>
-              <a:endParaRPr sz="2800" dirty="0">
-                <a:solidFill>
-                  <a:schemeClr val="bg1"/>
-                </a:solidFill>
-              </a:endParaRPr>
-            </a:p>
-          </p:txBody>
-        </p:sp>
-      </p:grpSp>
-      <p:sp>
-        <p:nvSpPr>
-          <p:cNvPr id="12" name="TextBox 11"/>
-          <p:cNvSpPr txBox="1"/>
-          <p:nvPr/>
-        </p:nvSpPr>
-        <p:spPr>
-          <a:xfrm>
-            <a:off x="2477248" y="393846"/>
-            <a:ext cx="5120640" cy="430887"/>
-          </a:xfrm>
-          <a:prstGeom prst="rect">
-            <a:avLst/>
-          </a:prstGeom>
-          <a:noFill/>
-        </p:spPr>
-        <p:txBody>
-          <a:bodyPr wrap="square">
-            <a:spAutoFit/>
-          </a:bodyPr>
-          <a:lstStyle/>
-          <a:p>
-            <a:pPr algn="ctr">
-              <a:spcAft>
-                <a:spcPts val="700"/>
-              </a:spcAft>
-              <a:defRPr sz="2200" b="1">
-                <a:solidFill>
-                  <a:srgbClr val="233464"/>
-                </a:solidFill>
-                <a:latin typeface="Aptos"/>
-              </a:defRPr>
-            </a:pPr>
-            <a:r>
-              <a:rPr lang="en-US" dirty="0">
-                <a:solidFill>
-                  <a:schemeClr val="bg1"/>
-                </a:solidFill>
-                <a:latin typeface="Times New Roman" pitchFamily="18" charset="0"/>
-                <a:cs typeface="Times New Roman" pitchFamily="18" charset="0"/>
-              </a:rPr>
-              <a:t>IMPLEMENTATION WORKFLOW</a:t>
-            </a:r>
-          </a:p>
-        </p:txBody>
-      </p:sp>
-      <p:sp>
-        <p:nvSpPr>
-          <p:cNvPr id="14" name="Chevron 13"/>
-          <p:cNvSpPr/>
-          <p:nvPr/>
-        </p:nvSpPr>
-        <p:spPr>
-          <a:xfrm>
-            <a:off x="228600" y="1719103"/>
-            <a:ext cx="3246120" cy="960120"/>
-          </a:xfrm>
-          <a:prstGeom prst="chevron">
-            <a:avLst/>
-          </a:prstGeom>
-          <a:solidFill>
-            <a:srgbClr val="233464"/>
-          </a:solidFill>
-          <a:ln w="19050">
-            <a:solidFill>
-              <a:srgbClr val="FFFFFF"/>
-            </a:solidFill>
-          </a:ln>
-          <a:effectLst/>
-        </p:spPr>
-        <p:style>
-          <a:lnRef idx="1">
-            <a:schemeClr val="accent1"/>
-          </a:lnRef>
-          <a:fillRef idx="3">
-            <a:schemeClr val="accent1"/>
-          </a:fillRef>
-          <a:effectRef idx="2">
-            <a:schemeClr val="accent1"/>
-          </a:effectRef>
-          <a:fontRef idx="minor">
-            <a:schemeClr val="lt1"/>
-          </a:fontRef>
-        </p:style>
-        <p:txBody>
-          <a:bodyPr wrap="square" rtlCol="0" anchor="ctr"/>
-          <a:lstStyle/>
-          <a:p>
-            <a:pPr algn="ctr"/>
-            <a:r>
-              <a:rPr sz="1300" b="1" dirty="0">
-                <a:solidFill>
-                  <a:srgbClr val="FFFFFF"/>
-                </a:solidFill>
-                <a:latin typeface="Times New Roman"/>
-              </a:rPr>
-              <a:t>1. Data
-Collection</a:t>
-            </a:r>
-          </a:p>
-        </p:txBody>
-      </p:sp>
-      <p:sp>
-        <p:nvSpPr>
-          <p:cNvPr id="15" name="Chevron 14"/>
-          <p:cNvSpPr/>
-          <p:nvPr/>
-        </p:nvSpPr>
-        <p:spPr>
-          <a:xfrm>
-            <a:off x="3124200" y="1719103"/>
-            <a:ext cx="3246120" cy="960120"/>
-          </a:xfrm>
-          <a:prstGeom prst="chevron">
-            <a:avLst/>
-          </a:prstGeom>
-          <a:solidFill>
-            <a:srgbClr val="FF6600"/>
-          </a:solidFill>
-          <a:ln w="19050">
-            <a:solidFill>
-              <a:srgbClr val="FFFFFF"/>
-            </a:solidFill>
-          </a:ln>
-          <a:effectLst/>
-        </p:spPr>
-        <p:style>
-          <a:lnRef idx="1">
-            <a:schemeClr val="accent1"/>
-          </a:lnRef>
-          <a:fillRef idx="3">
-            <a:schemeClr val="accent1"/>
-          </a:fillRef>
-          <a:effectRef idx="2">
-            <a:schemeClr val="accent1"/>
-          </a:effectRef>
-          <a:fontRef idx="minor">
-            <a:schemeClr val="lt1"/>
-          </a:fontRef>
-        </p:style>
-        <p:txBody>
-          <a:bodyPr wrap="square" rtlCol="0" anchor="ctr"/>
-          <a:lstStyle/>
-          <a:p>
-            <a:pPr algn="ctr"/>
-            <a:r>
-              <a:rPr sz="1300" b="1" dirty="0">
-                <a:solidFill>
-                  <a:srgbClr val="FFFFFF"/>
-                </a:solidFill>
-                <a:latin typeface="Times New Roman"/>
-              </a:rPr>
-              <a:t>2. Data
-Cleaning</a:t>
-            </a:r>
-          </a:p>
-        </p:txBody>
-      </p:sp>
-      <p:sp>
-        <p:nvSpPr>
-          <p:cNvPr id="16" name="Chevron 15"/>
-          <p:cNvSpPr/>
-          <p:nvPr/>
-        </p:nvSpPr>
-        <p:spPr>
-          <a:xfrm>
-            <a:off x="6049537" y="1711855"/>
-            <a:ext cx="3246120" cy="960120"/>
-          </a:xfrm>
-          <a:prstGeom prst="chevron">
-            <a:avLst/>
-          </a:prstGeom>
-          <a:solidFill>
-            <a:srgbClr val="233464"/>
-          </a:solidFill>
-          <a:ln w="19050">
-            <a:solidFill>
-              <a:srgbClr val="FFFFFF"/>
-            </a:solidFill>
-          </a:ln>
-          <a:effectLst/>
-        </p:spPr>
-        <p:style>
-          <a:lnRef idx="1">
-            <a:schemeClr val="accent1"/>
-          </a:lnRef>
-          <a:fillRef idx="3">
-            <a:schemeClr val="accent1"/>
-          </a:fillRef>
-          <a:effectRef idx="2">
-            <a:schemeClr val="accent1"/>
-          </a:effectRef>
-          <a:fontRef idx="minor">
-            <a:schemeClr val="lt1"/>
-          </a:fontRef>
-        </p:style>
-        <p:txBody>
-          <a:bodyPr wrap="square" rtlCol="0" anchor="ctr"/>
-          <a:lstStyle/>
-          <a:p>
-            <a:pPr algn="ctr"/>
-            <a:r>
-              <a:rPr sz="1300" b="1">
-                <a:solidFill>
-                  <a:srgbClr val="FFFFFF"/>
-                </a:solidFill>
-                <a:latin typeface="Times New Roman"/>
-              </a:rPr>
-              <a:t>3. Pre-
-processing</a:t>
-            </a:r>
-          </a:p>
-        </p:txBody>
-      </p:sp>
-      <p:sp>
-        <p:nvSpPr>
-          <p:cNvPr id="17" name="Chevron 16"/>
-          <p:cNvSpPr/>
-          <p:nvPr/>
-        </p:nvSpPr>
-        <p:spPr>
-          <a:xfrm>
-            <a:off x="275510" y="4214731"/>
-            <a:ext cx="3246120" cy="960120"/>
-          </a:xfrm>
-          <a:prstGeom prst="chevron">
-            <a:avLst/>
-          </a:prstGeom>
-          <a:solidFill>
-            <a:srgbClr val="FF6600"/>
-          </a:solidFill>
-          <a:ln w="19050">
-            <a:solidFill>
-              <a:srgbClr val="FFFFFF"/>
-            </a:solidFill>
-          </a:ln>
-          <a:effectLst/>
-        </p:spPr>
-        <p:style>
-          <a:lnRef idx="1">
-            <a:schemeClr val="accent1"/>
-          </a:lnRef>
-          <a:fillRef idx="3">
-            <a:schemeClr val="accent1"/>
-          </a:fillRef>
-          <a:effectRef idx="2">
-            <a:schemeClr val="accent1"/>
-          </a:effectRef>
-          <a:fontRef idx="minor">
-            <a:schemeClr val="lt1"/>
-          </a:fontRef>
-        </p:style>
-        <p:txBody>
-          <a:bodyPr wrap="square" rtlCol="0" anchor="ctr"/>
-          <a:lstStyle/>
-          <a:p>
-            <a:pPr algn="ctr"/>
-            <a:r>
-              <a:rPr sz="1300" b="1" dirty="0">
-                <a:solidFill>
-                  <a:srgbClr val="FFFFFF"/>
-                </a:solidFill>
-                <a:latin typeface="Times New Roman"/>
-              </a:rPr>
-              <a:t>4. EDA</a:t>
-            </a:r>
-          </a:p>
-        </p:txBody>
-      </p:sp>
-      <p:sp>
-        <p:nvSpPr>
-          <p:cNvPr id="18" name="Chevron 17"/>
-          <p:cNvSpPr/>
-          <p:nvPr/>
-        </p:nvSpPr>
-        <p:spPr>
-          <a:xfrm>
-            <a:off x="3236716" y="4257291"/>
-            <a:ext cx="3246120" cy="960120"/>
-          </a:xfrm>
-          <a:prstGeom prst="chevron">
-            <a:avLst/>
-          </a:prstGeom>
-          <a:solidFill>
-            <a:srgbClr val="233464"/>
-          </a:solidFill>
-          <a:ln w="19050">
-            <a:solidFill>
-              <a:srgbClr val="FFFFFF"/>
-            </a:solidFill>
-          </a:ln>
-          <a:effectLst/>
-        </p:spPr>
-        <p:style>
-          <a:lnRef idx="1">
-            <a:schemeClr val="accent1"/>
-          </a:lnRef>
-          <a:fillRef idx="3">
-            <a:schemeClr val="accent1"/>
-          </a:fillRef>
-          <a:effectRef idx="2">
-            <a:schemeClr val="accent1"/>
-          </a:effectRef>
-          <a:fontRef idx="minor">
-            <a:schemeClr val="lt1"/>
-          </a:fontRef>
-        </p:style>
-        <p:txBody>
-          <a:bodyPr wrap="square" rtlCol="0" anchor="ctr"/>
-          <a:lstStyle/>
-          <a:p>
-            <a:pPr algn="ctr"/>
-            <a:r>
-              <a:rPr sz="1300" b="1">
-                <a:solidFill>
-                  <a:srgbClr val="FFFFFF"/>
-                </a:solidFill>
-                <a:latin typeface="Times New Roman"/>
-              </a:rPr>
-              <a:t>5. Visualization</a:t>
-            </a:r>
-          </a:p>
-        </p:txBody>
-      </p:sp>
-      <p:sp>
-        <p:nvSpPr>
-          <p:cNvPr id="19" name="Chevron 18"/>
-          <p:cNvSpPr/>
-          <p:nvPr/>
-        </p:nvSpPr>
-        <p:spPr>
-          <a:xfrm>
-            <a:off x="6197922" y="4225882"/>
-            <a:ext cx="3246120" cy="960120"/>
-          </a:xfrm>
-          <a:prstGeom prst="chevron">
-            <a:avLst/>
-          </a:prstGeom>
-          <a:solidFill>
-            <a:srgbClr val="FF6600"/>
-          </a:solidFill>
-          <a:ln w="19050">
-            <a:solidFill>
-              <a:srgbClr val="FFFFFF"/>
-            </a:solidFill>
-          </a:ln>
-          <a:effectLst/>
-        </p:spPr>
-        <p:style>
-          <a:lnRef idx="1">
-            <a:schemeClr val="accent1"/>
-          </a:lnRef>
-          <a:fillRef idx="3">
-            <a:schemeClr val="accent1"/>
-          </a:fillRef>
-          <a:effectRef idx="2">
-            <a:schemeClr val="accent1"/>
-          </a:effectRef>
-          <a:fontRef idx="minor">
-            <a:schemeClr val="lt1"/>
-          </a:fontRef>
-        </p:style>
-        <p:txBody>
-          <a:bodyPr wrap="square" rtlCol="0" anchor="ctr"/>
-          <a:lstStyle/>
-          <a:p>
-            <a:pPr algn="ctr"/>
-            <a:r>
-              <a:rPr sz="1300" b="1">
-                <a:solidFill>
-                  <a:srgbClr val="FFFFFF"/>
-                </a:solidFill>
-                <a:latin typeface="Times New Roman"/>
-              </a:rPr>
-              <a:t>6. Insights &amp;
-Report</a:t>
-            </a:r>
-          </a:p>
-        </p:txBody>
-      </p:sp>
-      <p:sp>
-        <p:nvSpPr>
-          <p:cNvPr id="21" name="TextBox 20"/>
-          <p:cNvSpPr txBox="1"/>
-          <p:nvPr/>
-        </p:nvSpPr>
-        <p:spPr>
-          <a:xfrm>
-            <a:off x="4859891" y="5213322"/>
-            <a:ext cx="184731" cy="292388"/>
-          </a:xfrm>
-          <a:prstGeom prst="rect">
-            <a:avLst/>
-          </a:prstGeom>
-          <a:noFill/>
-        </p:spPr>
-        <p:txBody>
-          <a:bodyPr wrap="none">
-            <a:spAutoFit/>
-          </a:bodyPr>
-          <a:lstStyle/>
-          <a:p>
-            <a:pPr algn="ctr"/>
-            <a:endParaRPr sz="1300" i="1" dirty="0">
-              <a:solidFill>
-                <a:srgbClr val="233464"/>
-              </a:solidFill>
-              <a:latin typeface="Times New Roman"/>
-            </a:endParaRPr>
-          </a:p>
-        </p:txBody>
-      </p:sp>
-      <p:sp>
-        <p:nvSpPr>
-          <p:cNvPr id="63" name="Rounded Rectangle 10">
-            <a:extLst>
-              <a:ext uri="{FF2B5EF4-FFF2-40B4-BE49-F238E27FC236}">
-                <a16:creationId xmlns:a16="http://schemas.microsoft.com/office/drawing/2014/main" id="{087328AC-DF61-2F55-D12C-1D3B8267CE35}"/>
-              </a:ext>
-            </a:extLst>
-          </p:cNvPr>
-          <p:cNvSpPr/>
-          <p:nvPr/>
-        </p:nvSpPr>
-        <p:spPr>
-          <a:xfrm>
-            <a:off x="264916" y="2816352"/>
-            <a:ext cx="2859284" cy="1078992"/>
-          </a:xfrm>
-          <a:prstGeom prst="roundRect">
-            <a:avLst/>
-          </a:prstGeom>
-          <a:solidFill>
-            <a:srgbClr val="EBF4FD"/>
-          </a:solidFill>
-          <a:ln>
-            <a:solidFill>
-              <a:srgbClr val="EBF4FD"/>
-            </a:solidFill>
-          </a:ln>
-        </p:spPr>
-        <p:style>
-          <a:lnRef idx="1">
-            <a:schemeClr val="accent1"/>
-          </a:lnRef>
-          <a:fillRef idx="3">
-            <a:schemeClr val="accent1"/>
-          </a:fillRef>
-          <a:effectRef idx="2">
-            <a:schemeClr val="accent1"/>
-          </a:effectRef>
-          <a:fontRef idx="minor">
-            <a:schemeClr val="lt1"/>
-          </a:fontRef>
-        </p:style>
-        <p:txBody>
-          <a:bodyPr rtlCol="0" anchor="ctr"/>
-          <a:lstStyle/>
-          <a:p>
-            <a:pPr algn="ctr"/>
-            <a:endParaRPr/>
-          </a:p>
-        </p:txBody>
-      </p:sp>
-      <p:sp>
-        <p:nvSpPr>
-          <p:cNvPr id="65" name="TextBox 64">
-            <a:extLst>
-              <a:ext uri="{FF2B5EF4-FFF2-40B4-BE49-F238E27FC236}">
-                <a16:creationId xmlns:a16="http://schemas.microsoft.com/office/drawing/2014/main" id="{2FB61734-162A-15D4-36DC-F1D197A23651}"/>
-              </a:ext>
-            </a:extLst>
-          </p:cNvPr>
-          <p:cNvSpPr txBox="1"/>
-          <p:nvPr/>
-        </p:nvSpPr>
-        <p:spPr>
-          <a:xfrm>
-            <a:off x="91440" y="3026270"/>
-            <a:ext cx="3108960" cy="659155"/>
-          </a:xfrm>
-          <a:prstGeom prst="rect">
-            <a:avLst/>
-          </a:prstGeom>
-          <a:noFill/>
-        </p:spPr>
-        <p:txBody>
-          <a:bodyPr wrap="square" lIns="0" tIns="0" rIns="0" bIns="0">
-            <a:spAutoFit/>
-          </a:bodyPr>
-          <a:lstStyle/>
-          <a:p>
-            <a:pPr algn="ctr">
-              <a:spcAft>
-                <a:spcPts val="500"/>
-              </a:spcAft>
-            </a:pPr>
-            <a:r>
-              <a:rPr sz="1150" dirty="0">
-                <a:solidFill>
-                  <a:srgbClr val="124178"/>
-                </a:solidFill>
-                <a:latin typeface="Times New Roman"/>
-              </a:rPr>
-              <a:t>• 250,000 transactions</a:t>
-            </a:r>
-          </a:p>
-          <a:p>
-            <a:pPr algn="ctr">
-              <a:spcAft>
-                <a:spcPts val="500"/>
-              </a:spcAft>
-            </a:pPr>
-            <a:r>
-              <a:rPr sz="1150" dirty="0">
-                <a:solidFill>
-                  <a:srgbClr val="124178"/>
-                </a:solidFill>
-                <a:latin typeface="Times New Roman"/>
-              </a:rPr>
-              <a:t>• </a:t>
-            </a:r>
-            <a:r>
-              <a:rPr lang="en-US" sz="1150" dirty="0">
-                <a:solidFill>
-                  <a:srgbClr val="124178"/>
-                </a:solidFill>
-                <a:latin typeface="Times New Roman"/>
-              </a:rPr>
-              <a:t>2</a:t>
-            </a:r>
-            <a:r>
-              <a:rPr sz="1150" dirty="0">
-                <a:solidFill>
-                  <a:srgbClr val="124178"/>
-                </a:solidFill>
-                <a:latin typeface="Times New Roman"/>
-              </a:rPr>
-              <a:t>7 fields</a:t>
-            </a:r>
-          </a:p>
-          <a:p>
-            <a:pPr algn="ctr">
-              <a:spcAft>
-                <a:spcPts val="500"/>
-              </a:spcAft>
-            </a:pPr>
-            <a:r>
-              <a:rPr sz="1150" dirty="0">
-                <a:solidFill>
-                  <a:srgbClr val="124178"/>
-                </a:solidFill>
-                <a:latin typeface="Times New Roman"/>
-              </a:rPr>
-              <a:t>• UPI Transactions 2024</a:t>
-            </a:r>
-          </a:p>
-        </p:txBody>
-      </p:sp>
-      <p:sp>
-        <p:nvSpPr>
-          <p:cNvPr id="69" name="TextBox 68">
-            <a:extLst>
-              <a:ext uri="{FF2B5EF4-FFF2-40B4-BE49-F238E27FC236}">
-                <a16:creationId xmlns:a16="http://schemas.microsoft.com/office/drawing/2014/main" id="{DDB469E6-E9B6-E358-92E4-D01EB88A7030}"/>
-              </a:ext>
-            </a:extLst>
-          </p:cNvPr>
-          <p:cNvSpPr txBox="1"/>
-          <p:nvPr/>
-        </p:nvSpPr>
-        <p:spPr>
-          <a:xfrm>
-            <a:off x="4134293" y="2985060"/>
-            <a:ext cx="3108960" cy="969264"/>
-          </a:xfrm>
-          <a:prstGeom prst="rect">
-            <a:avLst/>
-          </a:prstGeom>
-          <a:noFill/>
-        </p:spPr>
-        <p:txBody>
-          <a:bodyPr wrap="square" lIns="0" tIns="0" rIns="0" bIns="0">
-            <a:spAutoFit/>
-          </a:bodyPr>
-          <a:lstStyle/>
-          <a:p>
-            <a:pPr>
-              <a:spcAft>
-                <a:spcPts val="500"/>
-              </a:spcAft>
-            </a:pPr>
-            <a:r>
-              <a:rPr sz="1150">
-                <a:solidFill>
-                  <a:srgbClr val="124178"/>
-                </a:solidFill>
-                <a:latin typeface="Times New Roman"/>
-              </a:rPr>
-              <a:t>• 0 missing values</a:t>
-            </a:r>
-          </a:p>
-          <a:p>
-            <a:pPr>
-              <a:spcAft>
-                <a:spcPts val="500"/>
-              </a:spcAft>
-            </a:pPr>
-            <a:r>
-              <a:rPr sz="1150">
-                <a:solidFill>
-                  <a:srgbClr val="124178"/>
-                </a:solidFill>
-                <a:latin typeface="Times New Roman"/>
-              </a:rPr>
-              <a:t>• 0 duplicate rows</a:t>
-            </a:r>
-          </a:p>
-          <a:p>
-            <a:pPr>
-              <a:spcAft>
-                <a:spcPts val="500"/>
-              </a:spcAft>
-            </a:pPr>
-            <a:r>
-              <a:rPr sz="1150">
-                <a:solidFill>
-                  <a:srgbClr val="124178"/>
-                </a:solidFill>
-                <a:latin typeface="Times New Roman"/>
-              </a:rPr>
-              <a:t>• standardize categories</a:t>
-            </a:r>
-          </a:p>
-        </p:txBody>
-      </p:sp>
-      <p:sp>
-        <p:nvSpPr>
-          <p:cNvPr id="77" name="Rounded Rectangle 10">
-            <a:extLst>
-              <a:ext uri="{FF2B5EF4-FFF2-40B4-BE49-F238E27FC236}">
-                <a16:creationId xmlns:a16="http://schemas.microsoft.com/office/drawing/2014/main" id="{783C42F9-4869-9ABD-5E27-04D95271AE25}"/>
-              </a:ext>
-            </a:extLst>
-          </p:cNvPr>
-          <p:cNvSpPr/>
-          <p:nvPr/>
-        </p:nvSpPr>
-        <p:spPr>
-          <a:xfrm>
-            <a:off x="6338804" y="2784813"/>
-            <a:ext cx="2859284" cy="1078992"/>
-          </a:xfrm>
-          <a:prstGeom prst="roundRect">
-            <a:avLst/>
-          </a:prstGeom>
-          <a:solidFill>
-            <a:srgbClr val="EBF4FD"/>
-          </a:solidFill>
-          <a:ln>
-            <a:solidFill>
-              <a:srgbClr val="EBF4FD"/>
-            </a:solidFill>
-          </a:ln>
-        </p:spPr>
-        <p:style>
-          <a:lnRef idx="1">
-            <a:schemeClr val="accent1"/>
-          </a:lnRef>
-          <a:fillRef idx="3">
-            <a:schemeClr val="accent1"/>
-          </a:fillRef>
-          <a:effectRef idx="2">
-            <a:schemeClr val="accent1"/>
-          </a:effectRef>
-          <a:fontRef idx="minor">
-            <a:schemeClr val="lt1"/>
-          </a:fontRef>
-        </p:style>
-        <p:txBody>
-          <a:bodyPr rtlCol="0" anchor="ctr"/>
-          <a:lstStyle/>
-          <a:p>
-            <a:pPr algn="ctr"/>
-            <a:endParaRPr/>
-          </a:p>
-        </p:txBody>
-      </p:sp>
-      <p:sp>
-        <p:nvSpPr>
-          <p:cNvPr id="79" name="Rounded Rectangle 10">
-            <a:extLst>
-              <a:ext uri="{FF2B5EF4-FFF2-40B4-BE49-F238E27FC236}">
-                <a16:creationId xmlns:a16="http://schemas.microsoft.com/office/drawing/2014/main" id="{6844F22D-C446-0FFE-268F-0D4EDEEFB5E6}"/>
-              </a:ext>
-            </a:extLst>
-          </p:cNvPr>
-          <p:cNvSpPr/>
-          <p:nvPr/>
-        </p:nvSpPr>
-        <p:spPr>
-          <a:xfrm>
-            <a:off x="362485" y="5470971"/>
-            <a:ext cx="2859284" cy="1078992"/>
-          </a:xfrm>
-          <a:prstGeom prst="roundRect">
-            <a:avLst/>
-          </a:prstGeom>
-          <a:solidFill>
-            <a:srgbClr val="EBF4FD"/>
-          </a:solidFill>
-          <a:ln>
-            <a:solidFill>
-              <a:srgbClr val="EBF4FD"/>
-            </a:solidFill>
-          </a:ln>
-        </p:spPr>
-        <p:style>
-          <a:lnRef idx="1">
-            <a:schemeClr val="accent1"/>
-          </a:lnRef>
-          <a:fillRef idx="3">
-            <a:schemeClr val="accent1"/>
-          </a:fillRef>
-          <a:effectRef idx="2">
-            <a:schemeClr val="accent1"/>
-          </a:effectRef>
-          <a:fontRef idx="minor">
-            <a:schemeClr val="lt1"/>
-          </a:fontRef>
-        </p:style>
-        <p:txBody>
-          <a:bodyPr rtlCol="0" anchor="ctr"/>
-          <a:lstStyle/>
-          <a:p>
-            <a:pPr algn="ctr"/>
-            <a:endParaRPr/>
-          </a:p>
-        </p:txBody>
-      </p:sp>
-      <p:sp>
-        <p:nvSpPr>
-          <p:cNvPr id="81" name="Rounded Rectangle 10">
-            <a:extLst>
-              <a:ext uri="{FF2B5EF4-FFF2-40B4-BE49-F238E27FC236}">
-                <a16:creationId xmlns:a16="http://schemas.microsoft.com/office/drawing/2014/main" id="{E4F89B8A-0B08-F535-FB2B-676278C956A3}"/>
-              </a:ext>
-            </a:extLst>
-          </p:cNvPr>
-          <p:cNvSpPr/>
-          <p:nvPr/>
-        </p:nvSpPr>
-        <p:spPr>
-          <a:xfrm>
-            <a:off x="3415187" y="5453489"/>
-            <a:ext cx="2859284" cy="1078992"/>
-          </a:xfrm>
-          <a:prstGeom prst="roundRect">
-            <a:avLst/>
-          </a:prstGeom>
-          <a:solidFill>
-            <a:srgbClr val="EBF4FD"/>
-          </a:solidFill>
-          <a:ln>
-            <a:solidFill>
-              <a:srgbClr val="EBF4FD"/>
-            </a:solidFill>
-          </a:ln>
-        </p:spPr>
-        <p:style>
-          <a:lnRef idx="1">
-            <a:schemeClr val="accent1"/>
-          </a:lnRef>
-          <a:fillRef idx="3">
-            <a:schemeClr val="accent1"/>
-          </a:fillRef>
-          <a:effectRef idx="2">
-            <a:schemeClr val="accent1"/>
-          </a:effectRef>
-          <a:fontRef idx="minor">
-            <a:schemeClr val="lt1"/>
-          </a:fontRef>
-        </p:style>
-        <p:txBody>
-          <a:bodyPr rtlCol="0" anchor="ctr"/>
-          <a:lstStyle/>
-          <a:p>
-            <a:pPr algn="ctr"/>
-            <a:endParaRPr/>
-          </a:p>
-        </p:txBody>
-      </p:sp>
-      <p:sp>
-        <p:nvSpPr>
-          <p:cNvPr id="83" name="Rounded Rectangle 10">
-            <a:extLst>
-              <a:ext uri="{FF2B5EF4-FFF2-40B4-BE49-F238E27FC236}">
-                <a16:creationId xmlns:a16="http://schemas.microsoft.com/office/drawing/2014/main" id="{6AD7835B-EFF3-210F-E8C7-972B058400FF}"/>
-              </a:ext>
-            </a:extLst>
-          </p:cNvPr>
-          <p:cNvSpPr/>
-          <p:nvPr/>
-        </p:nvSpPr>
-        <p:spPr>
-          <a:xfrm>
-            <a:off x="6436373" y="5439432"/>
-            <a:ext cx="2859284" cy="1078992"/>
-          </a:xfrm>
-          <a:prstGeom prst="roundRect">
-            <a:avLst/>
-          </a:prstGeom>
-          <a:solidFill>
-            <a:srgbClr val="EBF4FD"/>
-          </a:solidFill>
-          <a:ln>
-            <a:solidFill>
-              <a:srgbClr val="EBF4FD"/>
-            </a:solidFill>
-          </a:ln>
-        </p:spPr>
-        <p:style>
-          <a:lnRef idx="1">
-            <a:schemeClr val="accent1"/>
-          </a:lnRef>
-          <a:fillRef idx="3">
-            <a:schemeClr val="accent1"/>
-          </a:fillRef>
-          <a:effectRef idx="2">
-            <a:schemeClr val="accent1"/>
-          </a:effectRef>
-          <a:fontRef idx="minor">
-            <a:schemeClr val="lt1"/>
-          </a:fontRef>
-        </p:style>
-        <p:txBody>
-          <a:bodyPr rtlCol="0" anchor="ctr"/>
-          <a:lstStyle/>
-          <a:p>
-            <a:pPr algn="ctr"/>
-            <a:endParaRPr/>
-          </a:p>
-        </p:txBody>
-      </p:sp>
-      <p:sp>
-        <p:nvSpPr>
-          <p:cNvPr id="73" name="TextBox 72">
-            <a:extLst>
-              <a:ext uri="{FF2B5EF4-FFF2-40B4-BE49-F238E27FC236}">
-                <a16:creationId xmlns:a16="http://schemas.microsoft.com/office/drawing/2014/main" id="{DC7F5B61-E6AA-1BA0-150A-B1F68B246144}"/>
-              </a:ext>
-            </a:extLst>
-          </p:cNvPr>
-          <p:cNvSpPr txBox="1"/>
-          <p:nvPr/>
-        </p:nvSpPr>
-        <p:spPr>
-          <a:xfrm>
-            <a:off x="6949440" y="2939332"/>
-            <a:ext cx="3108960" cy="969264"/>
-          </a:xfrm>
-          <a:prstGeom prst="rect">
-            <a:avLst/>
-          </a:prstGeom>
-          <a:noFill/>
-        </p:spPr>
-        <p:txBody>
-          <a:bodyPr wrap="square" lIns="0" tIns="0" rIns="0" bIns="0">
-            <a:spAutoFit/>
-          </a:bodyPr>
-          <a:lstStyle/>
-          <a:p>
-            <a:pPr>
-              <a:spcAft>
-                <a:spcPts val="500"/>
-              </a:spcAft>
-            </a:pPr>
-            <a:r>
-              <a:rPr sz="1150" dirty="0">
-                <a:solidFill>
-                  <a:srgbClr val="124178"/>
-                </a:solidFill>
-                <a:latin typeface="Times New Roman"/>
-              </a:rPr>
-              <a:t>• Parse timestamp</a:t>
-            </a:r>
-          </a:p>
-          <a:p>
-            <a:pPr>
-              <a:spcAft>
-                <a:spcPts val="500"/>
-              </a:spcAft>
-            </a:pPr>
-            <a:r>
-              <a:rPr sz="1150" dirty="0">
-                <a:solidFill>
-                  <a:srgbClr val="124178"/>
-                </a:solidFill>
-                <a:latin typeface="Times New Roman"/>
-              </a:rPr>
-              <a:t>• encode fraud/status</a:t>
-            </a:r>
-          </a:p>
-          <a:p>
-            <a:pPr>
-              <a:spcAft>
-                <a:spcPts val="500"/>
-              </a:spcAft>
-            </a:pPr>
-            <a:r>
-              <a:rPr sz="1150" dirty="0">
-                <a:solidFill>
-                  <a:srgbClr val="124178"/>
-                </a:solidFill>
-                <a:latin typeface="Times New Roman"/>
-              </a:rPr>
-              <a:t>• derive hour &amp; weekend</a:t>
-            </a:r>
-          </a:p>
-        </p:txBody>
-      </p:sp>
-      <p:sp>
-        <p:nvSpPr>
-          <p:cNvPr id="91" name="TextBox 90">
-            <a:extLst>
-              <a:ext uri="{FF2B5EF4-FFF2-40B4-BE49-F238E27FC236}">
-                <a16:creationId xmlns:a16="http://schemas.microsoft.com/office/drawing/2014/main" id="{D6BC0CF8-9D39-CD3E-1873-350F1B694E45}"/>
-              </a:ext>
-            </a:extLst>
-          </p:cNvPr>
-          <p:cNvSpPr txBox="1"/>
-          <p:nvPr/>
-        </p:nvSpPr>
-        <p:spPr>
-          <a:xfrm>
-            <a:off x="1005840" y="5704157"/>
-            <a:ext cx="3108960" cy="969264"/>
-          </a:xfrm>
-          <a:prstGeom prst="rect">
-            <a:avLst/>
-          </a:prstGeom>
-          <a:noFill/>
-        </p:spPr>
-        <p:txBody>
-          <a:bodyPr wrap="square" lIns="0" tIns="0" rIns="0" bIns="0">
-            <a:spAutoFit/>
-          </a:bodyPr>
-          <a:lstStyle/>
-          <a:p>
-            <a:pPr>
-              <a:spcAft>
-                <a:spcPts val="500"/>
-              </a:spcAft>
-            </a:pPr>
-            <a:r>
-              <a:rPr sz="1150" dirty="0">
-                <a:solidFill>
-                  <a:srgbClr val="124178"/>
-                </a:solidFill>
-                <a:latin typeface="Times New Roman"/>
-              </a:rPr>
-              <a:t>• Analyze ₹ amounts</a:t>
-            </a:r>
-          </a:p>
-          <a:p>
-            <a:pPr>
-              <a:spcAft>
-                <a:spcPts val="500"/>
-              </a:spcAft>
-            </a:pPr>
-            <a:r>
-              <a:rPr sz="1150" dirty="0">
-                <a:solidFill>
-                  <a:srgbClr val="124178"/>
-                </a:solidFill>
-                <a:latin typeface="Times New Roman"/>
-              </a:rPr>
-              <a:t>• study fraud patterns</a:t>
-            </a:r>
-          </a:p>
-          <a:p>
-            <a:pPr>
-              <a:spcAft>
-                <a:spcPts val="500"/>
-              </a:spcAft>
-            </a:pPr>
-            <a:r>
-              <a:rPr sz="1150" dirty="0">
-                <a:solidFill>
-                  <a:srgbClr val="124178"/>
-                </a:solidFill>
-                <a:latin typeface="Times New Roman"/>
-              </a:rPr>
-              <a:t>• compare banks/categories</a:t>
-            </a:r>
-          </a:p>
-        </p:txBody>
-      </p:sp>
-      <p:sp>
-        <p:nvSpPr>
-          <p:cNvPr id="93" name="TextBox 92">
-            <a:extLst>
-              <a:ext uri="{FF2B5EF4-FFF2-40B4-BE49-F238E27FC236}">
-                <a16:creationId xmlns:a16="http://schemas.microsoft.com/office/drawing/2014/main" id="{994CBF75-DA50-26F2-2E15-988C114D7A30}"/>
-              </a:ext>
-            </a:extLst>
-          </p:cNvPr>
-          <p:cNvSpPr txBox="1"/>
-          <p:nvPr/>
-        </p:nvSpPr>
-        <p:spPr>
-          <a:xfrm>
-            <a:off x="4186018" y="5672748"/>
-            <a:ext cx="3108960" cy="969264"/>
-          </a:xfrm>
-          <a:prstGeom prst="rect">
-            <a:avLst/>
-          </a:prstGeom>
-          <a:noFill/>
-        </p:spPr>
-        <p:txBody>
-          <a:bodyPr wrap="square" lIns="0" tIns="0" rIns="0" bIns="0">
-            <a:spAutoFit/>
-          </a:bodyPr>
-          <a:lstStyle/>
-          <a:p>
-            <a:pPr>
-              <a:spcAft>
-                <a:spcPts val="500"/>
-              </a:spcAft>
-            </a:pPr>
-            <a:r>
-              <a:rPr sz="1150" dirty="0">
-                <a:solidFill>
-                  <a:srgbClr val="124178"/>
-                </a:solidFill>
-                <a:latin typeface="Times New Roman"/>
-              </a:rPr>
-              <a:t>• Monthly trends</a:t>
-            </a:r>
-          </a:p>
-          <a:p>
-            <a:pPr>
-              <a:spcAft>
-                <a:spcPts val="500"/>
-              </a:spcAft>
-            </a:pPr>
-            <a:r>
-              <a:rPr sz="1150" dirty="0">
-                <a:solidFill>
-                  <a:srgbClr val="124178"/>
-                </a:solidFill>
-                <a:latin typeface="Times New Roman"/>
-              </a:rPr>
-              <a:t>• state &amp; category charts</a:t>
-            </a:r>
-          </a:p>
-          <a:p>
-            <a:pPr>
-              <a:spcAft>
-                <a:spcPts val="500"/>
-              </a:spcAft>
-            </a:pPr>
-            <a:r>
-              <a:rPr sz="1150" dirty="0">
-                <a:solidFill>
-                  <a:srgbClr val="124178"/>
-                </a:solidFill>
-                <a:latin typeface="Times New Roman"/>
-              </a:rPr>
-              <a:t>• fraud/status visuals</a:t>
-            </a:r>
-          </a:p>
-        </p:txBody>
-      </p:sp>
-      <p:sp>
-        <p:nvSpPr>
-          <p:cNvPr id="95" name="TextBox 94">
-            <a:extLst>
-              <a:ext uri="{FF2B5EF4-FFF2-40B4-BE49-F238E27FC236}">
-                <a16:creationId xmlns:a16="http://schemas.microsoft.com/office/drawing/2014/main" id="{A15A2BAB-2487-E2B0-0B1E-1D797119D586}"/>
-              </a:ext>
-            </a:extLst>
-          </p:cNvPr>
-          <p:cNvSpPr txBox="1"/>
-          <p:nvPr/>
-        </p:nvSpPr>
-        <p:spPr>
-          <a:xfrm>
-            <a:off x="7177040" y="5518528"/>
-            <a:ext cx="3108960" cy="969264"/>
-          </a:xfrm>
-          <a:prstGeom prst="rect">
-            <a:avLst/>
-          </a:prstGeom>
-          <a:noFill/>
-        </p:spPr>
-        <p:txBody>
-          <a:bodyPr wrap="square" lIns="0" tIns="0" rIns="0" bIns="0">
-            <a:spAutoFit/>
-          </a:bodyPr>
-          <a:lstStyle/>
-          <a:p>
-            <a:pPr>
-              <a:spcAft>
-                <a:spcPts val="500"/>
-              </a:spcAft>
-            </a:pPr>
-            <a:r>
-              <a:rPr sz="1150" dirty="0">
-                <a:solidFill>
-                  <a:srgbClr val="124178"/>
-                </a:solidFill>
-                <a:latin typeface="Times New Roman"/>
-              </a:rPr>
-              <a:t>• 480 fraud flags</a:t>
-            </a:r>
-          </a:p>
-          <a:p>
-            <a:pPr>
-              <a:spcAft>
-                <a:spcPts val="500"/>
-              </a:spcAft>
-            </a:pPr>
-            <a:r>
-              <a:rPr sz="1150" dirty="0">
-                <a:solidFill>
-                  <a:srgbClr val="124178"/>
-                </a:solidFill>
-                <a:latin typeface="Times New Roman"/>
-              </a:rPr>
-              <a:t>• 237,624 successful</a:t>
-            </a:r>
-          </a:p>
-          <a:p>
-            <a:pPr>
-              <a:spcAft>
-                <a:spcPts val="500"/>
-              </a:spcAft>
-            </a:pPr>
-            <a:r>
-              <a:rPr sz="1150" dirty="0">
-                <a:solidFill>
-                  <a:srgbClr val="124178"/>
-                </a:solidFill>
-                <a:latin typeface="Times New Roman"/>
-              </a:rPr>
-              <a:t>• 12,376 failed</a:t>
-            </a:r>
-          </a:p>
-          <a:p>
-            <a:pPr>
-              <a:spcAft>
-                <a:spcPts val="500"/>
-              </a:spcAft>
-            </a:pPr>
-            <a:r>
-              <a:rPr sz="1150" dirty="0">
-                <a:solidFill>
-                  <a:srgbClr val="124178"/>
-                </a:solidFill>
-                <a:latin typeface="Times New Roman"/>
-              </a:rPr>
-              <a:t>• prepare dashboard/report</a:t>
-            </a:r>
-          </a:p>
-        </p:txBody>
-      </p:sp>
-      <p:pic>
-        <p:nvPicPr>
-          <p:cNvPr id="99" name="Picture 98">
-            <a:extLst>
-              <a:ext uri="{FF2B5EF4-FFF2-40B4-BE49-F238E27FC236}">
-                <a16:creationId xmlns:a16="http://schemas.microsoft.com/office/drawing/2014/main" id="{8273DBC5-BE08-91EB-CCA0-A31637BEF99C}"/>
-              </a:ext>
-            </a:extLst>
-          </p:cNvPr>
-          <p:cNvPicPr>
-            <a:picLocks noChangeAspect="1"/>
-          </p:cNvPicPr>
-          <p:nvPr/>
-        </p:nvPicPr>
-        <p:blipFill>
-          <a:blip r:embed="rId5"/>
-          <a:stretch>
-            <a:fillRect/>
-          </a:stretch>
-        </p:blipFill>
-        <p:spPr>
-          <a:xfrm>
-            <a:off x="2049780" y="1210376"/>
-            <a:ext cx="6315075" cy="323850"/>
-          </a:xfrm>
-          <a:prstGeom prst="rect">
-            <a:avLst/>
-          </a:prstGeom>
-        </p:spPr>
-      </p:pic>
-      <p:pic>
-        <p:nvPicPr>
-          <p:cNvPr id="101" name="object 3">
-            <a:extLst>
-              <a:ext uri="{FF2B5EF4-FFF2-40B4-BE49-F238E27FC236}">
-                <a16:creationId xmlns:a16="http://schemas.microsoft.com/office/drawing/2014/main" id="{68DAC9C6-FF26-8FB1-26BA-8CB83F34AABF}"/>
-              </a:ext>
-            </a:extLst>
-          </p:cNvPr>
-          <p:cNvPicPr/>
-          <p:nvPr/>
-        </p:nvPicPr>
-        <p:blipFill>
-          <a:blip r:embed="rId6" cstate="print"/>
-          <a:stretch>
-            <a:fillRect/>
-          </a:stretch>
-        </p:blipFill>
-        <p:spPr>
-          <a:xfrm>
-            <a:off x="290750" y="204311"/>
-            <a:ext cx="1163002" cy="424338"/>
-          </a:xfrm>
-          <a:prstGeom prst="rect">
-            <a:avLst/>
-          </a:prstGeom>
-        </p:spPr>
-      </p:pic>
-    </p:spTree>
-    <p:extLst>
-      <p:ext uri="{BB962C8B-B14F-4D97-AF65-F5344CB8AC3E}">
-        <p14:creationId xmlns:p14="http://schemas.microsoft.com/office/powerpoint/2010/main" val="49352596"/>
-      </p:ext>
-    </p:extLst>
-  </p:cSld>
-  <p:clrMapOvr>
-    <a:masterClrMapping/>
-  </p:clrMapOvr>
-</p:sld>
-</file>
-
-<file path=ppt/slides/slide14.xml><?xml version="1.0" encoding="utf-8"?>
-<p:sld xmlns:a="http://schemas.openxmlformats.org/drawingml/2006/main" xmlns:r="http://schemas.openxmlformats.org/officeDocument/2006/relationships" xmlns:p="http://schemas.openxmlformats.org/presentationml/2006/main">
-  <p:cSld>
-    <p:spTree>
-      <p:nvGrpSpPr>
-        <p:cNvPr id="1" name=""/>
-        <p:cNvGrpSpPr/>
-        <p:nvPr/>
-      </p:nvGrpSpPr>
-      <p:grpSpPr>
-        <a:xfrm>
-          <a:off x="0" y="0"/>
-          <a:ext cx="0" cy="0"/>
-          <a:chOff x="0" y="0"/>
-          <a:chExt cx="0" cy="0"/>
-        </a:xfrm>
-      </p:grpSpPr>
       <p:grpSp>
         <p:nvGrpSpPr>
           <p:cNvPr id="7" name="object 3">
@@ -7669,7 +6119,7 @@
 </p:sld>
 </file>
 
-<file path=ppt/slides/slide15.xml><?xml version="1.0" encoding="utf-8"?>
+<file path=ppt/slides/slide14.xml><?xml version="1.0" encoding="utf-8"?>
 <p:sld xmlns:a="http://schemas.openxmlformats.org/drawingml/2006/main" xmlns:r="http://schemas.openxmlformats.org/officeDocument/2006/relationships" xmlns:p="http://schemas.openxmlformats.org/presentationml/2006/main">
   <p:cSld>
     <p:bg>

--- a/PPTs/REVIEW - 2.pptx
+++ b/PPTs/REVIEW - 2.pptx
@@ -54,7 +54,7 @@
   <pc:docChgLst>
     <pc:chgData name="Manoj Reddy Tetala" userId="d0a499fca1df3751" providerId="LiveId" clId="{844F9A02-E604-4125-9813-311D2C5B92A5}"/>
     <pc:docChg chg="undo custSel delSld modSld">
-      <pc:chgData name="Manoj Reddy Tetala" userId="d0a499fca1df3751" providerId="LiveId" clId="{844F9A02-E604-4125-9813-311D2C5B92A5}" dt="2026-10-29T14:55:10.002" v="118" actId="47"/>
+      <pc:chgData name="Manoj Reddy Tetala" userId="d0a499fca1df3751" providerId="LiveId" clId="{844F9A02-E604-4125-9813-311D2C5B92A5}" dt="2026-10-30T04:12:36.374" v="144" actId="20577"/>
       <pc:docMkLst>
         <pc:docMk/>
       </pc:docMkLst>
@@ -74,7 +74,7 @@
         </pc:spChg>
       </pc:sldChg>
       <pc:sldChg chg="modSp mod">
-        <pc:chgData name="Manoj Reddy Tetala" userId="d0a499fca1df3751" providerId="LiveId" clId="{844F9A02-E604-4125-9813-311D2C5B92A5}" dt="2026-10-26T10:17:09.998" v="72"/>
+        <pc:chgData name="Manoj Reddy Tetala" userId="d0a499fca1df3751" providerId="LiveId" clId="{844F9A02-E604-4125-9813-311D2C5B92A5}" dt="2026-10-30T04:12:36.374" v="144" actId="20577"/>
         <pc:sldMkLst>
           <pc:docMk/>
           <pc:sldMk cId="0" sldId="257"/>
@@ -85,6 +85,14 @@
             <pc:docMk/>
             <pc:sldMk cId="0" sldId="257"/>
             <ac:spMk id="10" creationId="{00000000-0000-0000-0000-000000000000}"/>
+          </ac:spMkLst>
+        </pc:spChg>
+        <pc:spChg chg="mod">
+          <ac:chgData name="Manoj Reddy Tetala" userId="d0a499fca1df3751" providerId="LiveId" clId="{844F9A02-E604-4125-9813-311D2C5B92A5}" dt="2026-10-30T04:12:36.374" v="144" actId="20577"/>
+          <ac:spMkLst>
+            <pc:docMk/>
+            <pc:sldMk cId="0" sldId="257"/>
+            <ac:spMk id="11" creationId="{00000000-0000-0000-0000-000000000000}"/>
           </ac:spMkLst>
         </pc:spChg>
       </pc:sldChg>
@@ -1482,7 +1490,7 @@
             <a:fld id="{0B419B0A-DB98-47ED-A0D2-B47FD394FE07}" type="datetimeFigureOut">
               <a:rPr lang="en-IN" smtClean="0"/>
               <a:pPr/>
-              <a:t>29-10-2026</a:t>
+              <a:t>30-10-2026</a:t>
             </a:fld>
             <a:endParaRPr lang="en-IN"/>
           </a:p>
@@ -2097,7 +2105,7 @@
             <a:fld id="{1D8BD707-D9CF-40AE-B4C6-C98DA3205C09}" type="datetimeFigureOut">
               <a:rPr lang="en-US"/>
               <a:pPr/>
-              <a:t>10/29/2026</a:t>
+              <a:t>10/30/2026</a:t>
             </a:fld>
             <a:endParaRPr lang="en-US"/>
           </a:p>
@@ -2277,7 +2285,7 @@
             <a:fld id="{1D8BD707-D9CF-40AE-B4C6-C98DA3205C09}" type="datetimeFigureOut">
               <a:rPr lang="en-US"/>
               <a:pPr/>
-              <a:t>10/29/2026</a:t>
+              <a:t>10/30/2026</a:t>
             </a:fld>
             <a:endParaRPr lang="en-US"/>
           </a:p>
@@ -2494,7 +2502,7 @@
             <a:fld id="{1D8BD707-D9CF-40AE-B4C6-C98DA3205C09}" type="datetimeFigureOut">
               <a:rPr lang="en-US"/>
               <a:pPr/>
-              <a:t>10/29/2026</a:t>
+              <a:t>10/30/2026</a:t>
             </a:fld>
             <a:endParaRPr lang="en-US"/>
           </a:p>
@@ -2645,7 +2653,7 @@
             <a:fld id="{1D8BD707-D9CF-40AE-B4C6-C98DA3205C09}" type="datetimeFigureOut">
               <a:rPr lang="en-US"/>
               <a:pPr/>
-              <a:t>10/29/2026</a:t>
+              <a:t>10/30/2026</a:t>
             </a:fld>
             <a:endParaRPr lang="en-US"/>
           </a:p>
@@ -2961,7 +2969,7 @@
             <a:fld id="{1D8BD707-D9CF-40AE-B4C6-C98DA3205C09}" type="datetimeFigureOut">
               <a:rPr lang="en-US"/>
               <a:pPr/>
-              <a:t>10/29/2026</a:t>
+              <a:t>10/30/2026</a:t>
             </a:fld>
             <a:endParaRPr lang="en-US"/>
           </a:p>
@@ -3189,7 +3197,7 @@
             <a:fld id="{1D8BD707-D9CF-40AE-B4C6-C98DA3205C09}" type="datetimeFigureOut">
               <a:rPr lang="en-US"/>
               <a:pPr/>
-              <a:t>10/29/2026</a:t>
+              <a:t>10/30/2026</a:t>
             </a:fld>
             <a:endParaRPr lang="en-US"/>
           </a:p>
@@ -7053,7 +7061,7 @@
         <p:spPr>
           <a:xfrm>
             <a:off x="1219200" y="1676400"/>
-            <a:ext cx="7132320" cy="5052665"/>
+            <a:ext cx="7132320" cy="4593565"/>
           </a:xfrm>
           <a:prstGeom prst="rect">
             <a:avLst/>
@@ -7242,28 +7250,19 @@
                 <a:latin typeface="Times New Roman" panose="02020603050405020304" pitchFamily="18" charset="0"/>
                 <a:cs typeface="Times New Roman" panose="02020603050405020304" pitchFamily="18" charset="0"/>
               </a:rPr>
-              <a:t>• Key Insights &amp; Analysis</a:t>
-            </a:r>
-          </a:p>
-          <a:p>
-            <a:pPr algn="l">
-              <a:spcAft>
-                <a:spcPts val="700"/>
-              </a:spcAft>
-              <a:defRPr sz="2000" b="0">
-                <a:solidFill>
-                  <a:srgbClr val="2D2D2D"/>
-                </a:solidFill>
-                <a:latin typeface="Aptos"/>
-              </a:defRPr>
-            </a:pPr>
-            <a:r>
-              <a:rPr sz="2400" dirty="0">
+              <a:t>• Key Insights </a:t>
+            </a:r>
+            <a:r>
+              <a:rPr sz="2400">
                 <a:latin typeface="Times New Roman" panose="02020603050405020304" pitchFamily="18" charset="0"/>
                 <a:cs typeface="Times New Roman" panose="02020603050405020304" pitchFamily="18" charset="0"/>
               </a:rPr>
-              <a:t>• Implementation Workflow</a:t>
-            </a:r>
+              <a:t>&amp; Analysis</a:t>
+            </a:r>
+            <a:endParaRPr sz="2400" dirty="0">
+              <a:latin typeface="Times New Roman" panose="02020603050405020304" pitchFamily="18" charset="0"/>
+              <a:cs typeface="Times New Roman" panose="02020603050405020304" pitchFamily="18" charset="0"/>
+            </a:endParaRPr>
           </a:p>
           <a:p>
             <a:pPr algn="l">
